--- a/Lecture_Slides/PH 123 Lecture 05.pptx
+++ b/Lecture_Slides/PH 123 Lecture 05.pptx
@@ -5,7 +5,7 @@
     <p:sldMasterId id="2147483648" r:id="rId1"/>
   </p:sldMasterIdLst>
   <p:notesMasterIdLst>
-    <p:notesMasterId r:id="rId59"/>
+    <p:notesMasterId r:id="rId60"/>
   </p:notesMasterIdLst>
   <p:sldIdLst>
     <p:sldId id="343" r:id="rId2"/>
@@ -21,50 +21,51 @@
     <p:sldId id="293" r:id="rId12"/>
     <p:sldId id="294" r:id="rId13"/>
     <p:sldId id="295" r:id="rId14"/>
-    <p:sldId id="296" r:id="rId15"/>
-    <p:sldId id="317" r:id="rId16"/>
-    <p:sldId id="318" r:id="rId17"/>
-    <p:sldId id="319" r:id="rId18"/>
-    <p:sldId id="341" r:id="rId19"/>
-    <p:sldId id="340" r:id="rId20"/>
-    <p:sldId id="342" r:id="rId21"/>
-    <p:sldId id="292" r:id="rId22"/>
-    <p:sldId id="320" r:id="rId23"/>
-    <p:sldId id="321" r:id="rId24"/>
-    <p:sldId id="297" r:id="rId25"/>
-    <p:sldId id="322" r:id="rId26"/>
-    <p:sldId id="323" r:id="rId27"/>
-    <p:sldId id="344" r:id="rId28"/>
-    <p:sldId id="298" r:id="rId29"/>
-    <p:sldId id="299" r:id="rId30"/>
-    <p:sldId id="300" r:id="rId31"/>
-    <p:sldId id="324" r:id="rId32"/>
-    <p:sldId id="325" r:id="rId33"/>
-    <p:sldId id="326" r:id="rId34"/>
-    <p:sldId id="327" r:id="rId35"/>
-    <p:sldId id="328" r:id="rId36"/>
-    <p:sldId id="329" r:id="rId37"/>
-    <p:sldId id="301" r:id="rId38"/>
-    <p:sldId id="302" r:id="rId39"/>
-    <p:sldId id="330" r:id="rId40"/>
-    <p:sldId id="332" r:id="rId41"/>
-    <p:sldId id="333" r:id="rId42"/>
-    <p:sldId id="334" r:id="rId43"/>
-    <p:sldId id="335" r:id="rId44"/>
-    <p:sldId id="336" r:id="rId45"/>
-    <p:sldId id="337" r:id="rId46"/>
-    <p:sldId id="303" r:id="rId47"/>
-    <p:sldId id="304" r:id="rId48"/>
-    <p:sldId id="338" r:id="rId49"/>
-    <p:sldId id="305" r:id="rId50"/>
-    <p:sldId id="306" r:id="rId51"/>
-    <p:sldId id="307" r:id="rId52"/>
-    <p:sldId id="308" r:id="rId53"/>
-    <p:sldId id="281" r:id="rId54"/>
-    <p:sldId id="339" r:id="rId55"/>
-    <p:sldId id="283" r:id="rId56"/>
-    <p:sldId id="290" r:id="rId57"/>
-    <p:sldId id="291" r:id="rId58"/>
+    <p:sldId id="345" r:id="rId15"/>
+    <p:sldId id="296" r:id="rId16"/>
+    <p:sldId id="317" r:id="rId17"/>
+    <p:sldId id="318" r:id="rId18"/>
+    <p:sldId id="319" r:id="rId19"/>
+    <p:sldId id="341" r:id="rId20"/>
+    <p:sldId id="340" r:id="rId21"/>
+    <p:sldId id="342" r:id="rId22"/>
+    <p:sldId id="292" r:id="rId23"/>
+    <p:sldId id="320" r:id="rId24"/>
+    <p:sldId id="321" r:id="rId25"/>
+    <p:sldId id="297" r:id="rId26"/>
+    <p:sldId id="322" r:id="rId27"/>
+    <p:sldId id="323" r:id="rId28"/>
+    <p:sldId id="344" r:id="rId29"/>
+    <p:sldId id="298" r:id="rId30"/>
+    <p:sldId id="299" r:id="rId31"/>
+    <p:sldId id="300" r:id="rId32"/>
+    <p:sldId id="324" r:id="rId33"/>
+    <p:sldId id="325" r:id="rId34"/>
+    <p:sldId id="326" r:id="rId35"/>
+    <p:sldId id="327" r:id="rId36"/>
+    <p:sldId id="328" r:id="rId37"/>
+    <p:sldId id="329" r:id="rId38"/>
+    <p:sldId id="301" r:id="rId39"/>
+    <p:sldId id="302" r:id="rId40"/>
+    <p:sldId id="330" r:id="rId41"/>
+    <p:sldId id="332" r:id="rId42"/>
+    <p:sldId id="333" r:id="rId43"/>
+    <p:sldId id="334" r:id="rId44"/>
+    <p:sldId id="335" r:id="rId45"/>
+    <p:sldId id="336" r:id="rId46"/>
+    <p:sldId id="337" r:id="rId47"/>
+    <p:sldId id="303" r:id="rId48"/>
+    <p:sldId id="304" r:id="rId49"/>
+    <p:sldId id="338" r:id="rId50"/>
+    <p:sldId id="305" r:id="rId51"/>
+    <p:sldId id="306" r:id="rId52"/>
+    <p:sldId id="307" r:id="rId53"/>
+    <p:sldId id="308" r:id="rId54"/>
+    <p:sldId id="281" r:id="rId55"/>
+    <p:sldId id="339" r:id="rId56"/>
+    <p:sldId id="283" r:id="rId57"/>
+    <p:sldId id="290" r:id="rId58"/>
+    <p:sldId id="291" r:id="rId59"/>
   </p:sldIdLst>
   <p:sldSz cx="9144000" cy="6858000" type="screen4x3"/>
   <p:notesSz cx="6858000" cy="9144000"/>
@@ -182,148 +183,76 @@
 </p:presentation>
 </file>
 
+<file path=ppt/revisionInfo.xml><?xml version="1.0" encoding="utf-8"?>
+<p1510:revInfo xmlns:a="http://schemas.openxmlformats.org/drawingml/2006/main" xmlns:r="http://schemas.openxmlformats.org/officeDocument/2006/relationships" xmlns:p1510="http://schemas.microsoft.com/office/powerpoint/2015/10/main">
+  <p1510:revLst>
+    <p1510:client id="{03AE77D0-F62C-4E39-A1BA-97E45B6E9CD8}" v="4" dt="2026-04-23T21:25:49.770"/>
+  </p1510:revLst>
+</p1510:revInfo>
+</file>
+
 <file path=ppt/changesInfos/changesInfo1.xml><?xml version="1.0" encoding="utf-8"?>
 <pc:chgInfo xmlns:a="http://schemas.openxmlformats.org/drawingml/2006/main" xmlns:r="http://schemas.openxmlformats.org/officeDocument/2006/relationships" xmlns:ac="http://schemas.microsoft.com/office/drawing/2013/main/command" xmlns:pc="http://schemas.microsoft.com/office/powerpoint/2013/main/command">
   <pc:docChgLst>
-    <pc:chgData name="Lines, Todd" userId="afaf7c3a-e8aa-4568-882a-02ad8f9e19b0" providerId="ADAL" clId="{D58CCFC5-3DA2-496E-BB00-D0AA8000986B}"/>
-    <pc:docChg chg="undo custSel addSld modSld sldOrd">
-      <pc:chgData name="Lines, Todd" userId="afaf7c3a-e8aa-4568-882a-02ad8f9e19b0" providerId="ADAL" clId="{D58CCFC5-3DA2-496E-BB00-D0AA8000986B}" dt="2025-04-22T20:38:27.382" v="21" actId="20577"/>
+    <pc:chgData name="Lines, Todd" userId="afaf7c3a-e8aa-4568-882a-02ad8f9e19b0" providerId="ADAL" clId="{5FF5AC1B-ABA9-43D7-A1E3-2D92732CD6E2}"/>
+    <pc:docChg chg="undo custSel addSld modSld">
+      <pc:chgData name="Lines, Todd" userId="afaf7c3a-e8aa-4568-882a-02ad8f9e19b0" providerId="ADAL" clId="{5FF5AC1B-ABA9-43D7-A1E3-2D92732CD6E2}" dt="2026-04-23T21:25:55.095" v="9" actId="20577"/>
       <pc:docMkLst>
         <pc:docMk/>
       </pc:docMkLst>
-      <pc:sldChg chg="ord">
-        <pc:chgData name="Lines, Todd" userId="afaf7c3a-e8aa-4568-882a-02ad8f9e19b0" providerId="ADAL" clId="{D58CCFC5-3DA2-496E-BB00-D0AA8000986B}" dt="2025-04-22T20:14:06.349" v="14"/>
+      <pc:sldChg chg="addSp delSp modSp mod">
+        <pc:chgData name="Lines, Todd" userId="afaf7c3a-e8aa-4568-882a-02ad8f9e19b0" providerId="ADAL" clId="{5FF5AC1B-ABA9-43D7-A1E3-2D92732CD6E2}" dt="2026-04-23T21:22:20.331" v="7" actId="21"/>
         <pc:sldMkLst>
           <pc:docMk/>
-          <pc:sldMk cId="649968694" sldId="290"/>
+          <pc:sldMk cId="2224883554" sldId="313"/>
         </pc:sldMkLst>
+        <pc:spChg chg="add del">
+          <ac:chgData name="Lines, Todd" userId="afaf7c3a-e8aa-4568-882a-02ad8f9e19b0" providerId="ADAL" clId="{5FF5AC1B-ABA9-43D7-A1E3-2D92732CD6E2}" dt="2026-04-23T21:21:53.890" v="1" actId="22"/>
+          <ac:spMkLst>
+            <pc:docMk/>
+            <pc:sldMk cId="2224883554" sldId="313"/>
+            <ac:spMk id="3" creationId="{B950B44E-EC0F-9A8E-5ABF-7D01B31BBD16}"/>
+          </ac:spMkLst>
+        </pc:spChg>
+        <pc:picChg chg="add mod">
+          <ac:chgData name="Lines, Todd" userId="afaf7c3a-e8aa-4568-882a-02ad8f9e19b0" providerId="ADAL" clId="{5FF5AC1B-ABA9-43D7-A1E3-2D92732CD6E2}" dt="2026-04-23T21:22:07.069" v="5" actId="1076"/>
+          <ac:picMkLst>
+            <pc:docMk/>
+            <pc:sldMk cId="2224883554" sldId="313"/>
+            <ac:picMk id="5" creationId="{8001DD01-72A3-0AAC-F515-5EB673183406}"/>
+          </ac:picMkLst>
+        </pc:picChg>
+        <pc:picChg chg="del mod">
+          <ac:chgData name="Lines, Todd" userId="afaf7c3a-e8aa-4568-882a-02ad8f9e19b0" providerId="ADAL" clId="{5FF5AC1B-ABA9-43D7-A1E3-2D92732CD6E2}" dt="2026-04-23T21:22:20.331" v="7" actId="21"/>
+          <ac:picMkLst>
+            <pc:docMk/>
+            <pc:sldMk cId="2224883554" sldId="313"/>
+            <ac:picMk id="6" creationId="{44A34F58-4C8F-1B95-7031-D2BFEFE8630F}"/>
+          </ac:picMkLst>
+        </pc:picChg>
+        <pc:picChg chg="del">
+          <ac:chgData name="Lines, Todd" userId="afaf7c3a-e8aa-4568-882a-02ad8f9e19b0" providerId="ADAL" clId="{5FF5AC1B-ABA9-43D7-A1E3-2D92732CD6E2}" dt="2026-04-23T21:22:04.730" v="4" actId="478"/>
+          <ac:picMkLst>
+            <pc:docMk/>
+            <pc:sldMk cId="2224883554" sldId="313"/>
+            <ac:picMk id="52231" creationId="{00000000-0000-0000-0000-000000000000}"/>
+          </ac:picMkLst>
+        </pc:picChg>
       </pc:sldChg>
-      <pc:sldChg chg="ord">
-        <pc:chgData name="Lines, Todd" userId="afaf7c3a-e8aa-4568-882a-02ad8f9e19b0" providerId="ADAL" clId="{D58CCFC5-3DA2-496E-BB00-D0AA8000986B}" dt="2025-04-22T20:14:06.349" v="14"/>
+      <pc:sldChg chg="modSp add mod">
+        <pc:chgData name="Lines, Todd" userId="afaf7c3a-e8aa-4568-882a-02ad8f9e19b0" providerId="ADAL" clId="{5FF5AC1B-ABA9-43D7-A1E3-2D92732CD6E2}" dt="2026-04-23T21:25:55.095" v="9" actId="20577"/>
         <pc:sldMkLst>
           <pc:docMk/>
-          <pc:sldMk cId="2233542792" sldId="291"/>
-        </pc:sldMkLst>
-      </pc:sldChg>
-      <pc:sldChg chg="modSp mod">
-        <pc:chgData name="Lines, Todd" userId="afaf7c3a-e8aa-4568-882a-02ad8f9e19b0" providerId="ADAL" clId="{D58CCFC5-3DA2-496E-BB00-D0AA8000986B}" dt="2025-04-22T20:15:25.265" v="16" actId="20577"/>
-        <pc:sldMkLst>
-          <pc:docMk/>
-          <pc:sldMk cId="2768598267" sldId="317"/>
+          <pc:sldMk cId="4029346737" sldId="345"/>
         </pc:sldMkLst>
         <pc:spChg chg="mod">
-          <ac:chgData name="Lines, Todd" userId="afaf7c3a-e8aa-4568-882a-02ad8f9e19b0" providerId="ADAL" clId="{D58CCFC5-3DA2-496E-BB00-D0AA8000986B}" dt="2025-04-22T20:15:25.265" v="16" actId="20577"/>
+          <ac:chgData name="Lines, Todd" userId="afaf7c3a-e8aa-4568-882a-02ad8f9e19b0" providerId="ADAL" clId="{5FF5AC1B-ABA9-43D7-A1E3-2D92732CD6E2}" dt="2026-04-23T21:25:55.095" v="9" actId="20577"/>
           <ac:spMkLst>
             <pc:docMk/>
-            <pc:sldMk cId="2768598267" sldId="317"/>
-            <ac:spMk id="8200" creationId="{00000000-0000-0000-0000-000000000000}"/>
+            <pc:sldMk cId="4029346737" sldId="345"/>
+            <ac:spMk id="3" creationId="{1FD2476B-A95E-AFF7-964C-69C58A3EB540}"/>
           </ac:spMkLst>
         </pc:spChg>
-      </pc:sldChg>
-      <pc:sldChg chg="modSp new mod">
-        <pc:chgData name="Lines, Todd" userId="afaf7c3a-e8aa-4568-882a-02ad8f9e19b0" providerId="ADAL" clId="{D58CCFC5-3DA2-496E-BB00-D0AA8000986B}" dt="2025-04-22T20:07:52.230" v="9" actId="20577"/>
-        <pc:sldMkLst>
-          <pc:docMk/>
-          <pc:sldMk cId="923575370" sldId="343"/>
-        </pc:sldMkLst>
-        <pc:spChg chg="mod">
-          <ac:chgData name="Lines, Todd" userId="afaf7c3a-e8aa-4568-882a-02ad8f9e19b0" providerId="ADAL" clId="{D58CCFC5-3DA2-496E-BB00-D0AA8000986B}" dt="2025-04-22T20:07:52.230" v="9" actId="20577"/>
-          <ac:spMkLst>
-            <pc:docMk/>
-            <pc:sldMk cId="923575370" sldId="343"/>
-            <ac:spMk id="2" creationId="{B0348031-827F-38BB-1D13-8F93B6BD8A5A}"/>
-          </ac:spMkLst>
-        </pc:spChg>
-      </pc:sldChg>
-      <pc:sldChg chg="addSp delSp modSp new mod modClrScheme chgLayout">
-        <pc:chgData name="Lines, Todd" userId="afaf7c3a-e8aa-4568-882a-02ad8f9e19b0" providerId="ADAL" clId="{D58CCFC5-3DA2-496E-BB00-D0AA8000986B}" dt="2025-04-22T20:38:27.382" v="21" actId="20577"/>
-        <pc:sldMkLst>
-          <pc:docMk/>
-          <pc:sldMk cId="2180201229" sldId="344"/>
-        </pc:sldMkLst>
-        <pc:spChg chg="del mod ord">
-          <ac:chgData name="Lines, Todd" userId="afaf7c3a-e8aa-4568-882a-02ad8f9e19b0" providerId="ADAL" clId="{D58CCFC5-3DA2-496E-BB00-D0AA8000986B}" dt="2025-04-22T20:38:25.256" v="18" actId="700"/>
-          <ac:spMkLst>
-            <pc:docMk/>
-            <pc:sldMk cId="2180201229" sldId="344"/>
-            <ac:spMk id="2" creationId="{8A9C6977-2389-4502-D664-E9D9CF9CF667}"/>
-          </ac:spMkLst>
-        </pc:spChg>
-        <pc:spChg chg="del mod ord">
-          <ac:chgData name="Lines, Todd" userId="afaf7c3a-e8aa-4568-882a-02ad8f9e19b0" providerId="ADAL" clId="{D58CCFC5-3DA2-496E-BB00-D0AA8000986B}" dt="2025-04-22T20:38:25.256" v="18" actId="700"/>
-          <ac:spMkLst>
-            <pc:docMk/>
-            <pc:sldMk cId="2180201229" sldId="344"/>
-            <ac:spMk id="3" creationId="{2E3B6F4F-0BA0-65FC-A4EB-AAECB56D3B30}"/>
-          </ac:spMkLst>
-        </pc:spChg>
-        <pc:spChg chg="add mod ord">
-          <ac:chgData name="Lines, Todd" userId="afaf7c3a-e8aa-4568-882a-02ad8f9e19b0" providerId="ADAL" clId="{D58CCFC5-3DA2-496E-BB00-D0AA8000986B}" dt="2025-04-22T20:38:27.382" v="21" actId="20577"/>
-          <ac:spMkLst>
-            <pc:docMk/>
-            <pc:sldMk cId="2180201229" sldId="344"/>
-            <ac:spMk id="4" creationId="{D92F779A-5D6A-858C-4A69-5A500F40FF2D}"/>
-          </ac:spMkLst>
-        </pc:spChg>
-        <pc:spChg chg="add mod ord">
-          <ac:chgData name="Lines, Todd" userId="afaf7c3a-e8aa-4568-882a-02ad8f9e19b0" providerId="ADAL" clId="{D58CCFC5-3DA2-496E-BB00-D0AA8000986B}" dt="2025-04-22T20:38:25.256" v="18" actId="700"/>
-          <ac:spMkLst>
-            <pc:docMk/>
-            <pc:sldMk cId="2180201229" sldId="344"/>
-            <ac:spMk id="5" creationId="{EDDA31AA-F4F9-0FFC-A350-87D5B842DC36}"/>
-          </ac:spMkLst>
-        </pc:spChg>
-      </pc:sldChg>
-    </pc:docChg>
-  </pc:docChgLst>
-  <pc:docChgLst>
-    <pc:chgData name="Lines, Todd" userId="afaf7c3a-e8aa-4568-882a-02ad8f9e19b0" providerId="ADAL" clId="{A66EEBB2-87BF-43FC-ADFA-328BAEAA0FF8}"/>
-    <pc:docChg chg="custSel addSld modSld sldOrd">
-      <pc:chgData name="Lines, Todd" userId="afaf7c3a-e8aa-4568-882a-02ad8f9e19b0" providerId="ADAL" clId="{A66EEBB2-87BF-43FC-ADFA-328BAEAA0FF8}" dt="2019-04-29T15:51:18.699" v="114" actId="1076"/>
-      <pc:docMkLst>
-        <pc:docMk/>
-      </pc:docMkLst>
-      <pc:sldChg chg="ord">
-        <pc:chgData name="Lines, Todd" userId="afaf7c3a-e8aa-4568-882a-02ad8f9e19b0" providerId="ADAL" clId="{A66EEBB2-87BF-43FC-ADFA-328BAEAA0FF8}" dt="2019-04-26T22:31:13.691" v="60"/>
-        <pc:sldMkLst>
-          <pc:docMk/>
-          <pc:sldMk cId="669237571" sldId="292"/>
-        </pc:sldMkLst>
-      </pc:sldChg>
-      <pc:sldChg chg="delSp modSp">
-        <pc:chgData name="Lines, Todd" userId="afaf7c3a-e8aa-4568-882a-02ad8f9e19b0" providerId="ADAL" clId="{A66EEBB2-87BF-43FC-ADFA-328BAEAA0FF8}" dt="2019-04-26T22:50:49.895" v="103"/>
-        <pc:sldMkLst>
-          <pc:docMk/>
-          <pc:sldMk cId="2821442452" sldId="325"/>
-        </pc:sldMkLst>
-      </pc:sldChg>
-      <pc:sldChg chg="addSp delSp modSp">
-        <pc:chgData name="Lines, Todd" userId="afaf7c3a-e8aa-4568-882a-02ad8f9e19b0" providerId="ADAL" clId="{A66EEBB2-87BF-43FC-ADFA-328BAEAA0FF8}" dt="2019-04-26T22:52:31.447" v="109"/>
-        <pc:sldMkLst>
-          <pc:docMk/>
-          <pc:sldMk cId="2703566889" sldId="326"/>
-        </pc:sldMkLst>
-      </pc:sldChg>
-      <pc:sldChg chg="addSp delSp modSp">
-        <pc:chgData name="Lines, Todd" userId="afaf7c3a-e8aa-4568-882a-02ad8f9e19b0" providerId="ADAL" clId="{A66EEBB2-87BF-43FC-ADFA-328BAEAA0FF8}" dt="2019-04-29T15:51:18.699" v="114" actId="1076"/>
-        <pc:sldMkLst>
-          <pc:docMk/>
-          <pc:sldMk cId="2550486807" sldId="339"/>
-        </pc:sldMkLst>
-      </pc:sldChg>
-      <pc:sldChg chg="addSp delSp modSp add">
-        <pc:chgData name="Lines, Todd" userId="afaf7c3a-e8aa-4568-882a-02ad8f9e19b0" providerId="ADAL" clId="{A66EEBB2-87BF-43FC-ADFA-328BAEAA0FF8}" dt="2019-04-26T22:26:16.169" v="59"/>
-        <pc:sldMkLst>
-          <pc:docMk/>
-          <pc:sldMk cId="3573817043" sldId="341"/>
-        </pc:sldMkLst>
-      </pc:sldChg>
-      <pc:sldChg chg="addSp delSp modSp add">
-        <pc:chgData name="Lines, Todd" userId="afaf7c3a-e8aa-4568-882a-02ad8f9e19b0" providerId="ADAL" clId="{A66EEBB2-87BF-43FC-ADFA-328BAEAA0FF8}" dt="2019-04-26T22:36:04.326" v="101" actId="20577"/>
-        <pc:sldMkLst>
-          <pc:docMk/>
-          <pc:sldMk cId="1664177168" sldId="342"/>
-        </pc:sldMkLst>
       </pc:sldChg>
     </pc:docChg>
   </pc:docChgLst>
@@ -413,7 +342,7 @@
             <a:fld id="{DA2CA0F8-BD70-4694-BD56-6665D6FFBF3C}" type="datetimeFigureOut">
               <a:rPr lang="en-US" smtClean="0"/>
               <a:pPr/>
-              <a:t>4/22/2025</a:t>
+              <a:t>4/23/2026</a:t>
             </a:fld>
             <a:endParaRPr lang="en-US"/>
           </a:p>
@@ -796,7 +725,7 @@
                   <a:spcPct val="0"/>
                 </a:spcAft>
               </a:pPr>
-              <a:t>32</a:t>
+              <a:t>33</a:t>
             </a:fld>
             <a:endParaRPr lang="en-US" dirty="0"/>
           </a:p>
@@ -928,7 +857,7 @@
                   <a:spcPct val="0"/>
                 </a:spcAft>
               </a:pPr>
-              <a:t>34</a:t>
+              <a:t>35</a:t>
             </a:fld>
             <a:endParaRPr lang="en-US" dirty="0"/>
           </a:p>
@@ -1060,7 +989,7 @@
                   <a:spcPct val="0"/>
                 </a:spcAft>
               </a:pPr>
-              <a:t>35</a:t>
+              <a:t>36</a:t>
             </a:fld>
             <a:endParaRPr lang="en-US" dirty="0"/>
           </a:p>
@@ -1259,7 +1188,7 @@
             <a:fld id="{81363FC6-F0D5-4376-9B97-08D3CD3871A3}" type="datetimeFigureOut">
               <a:rPr lang="en-US" smtClean="0"/>
               <a:pPr/>
-              <a:t>4/22/2025</a:t>
+              <a:t>4/23/2026</a:t>
             </a:fld>
             <a:endParaRPr lang="en-US"/>
           </a:p>
@@ -1424,7 +1353,7 @@
             <a:fld id="{81363FC6-F0D5-4376-9B97-08D3CD3871A3}" type="datetimeFigureOut">
               <a:rPr lang="en-US" smtClean="0"/>
               <a:pPr/>
-              <a:t>4/22/2025</a:t>
+              <a:t>4/23/2026</a:t>
             </a:fld>
             <a:endParaRPr lang="en-US"/>
           </a:p>
@@ -1599,7 +1528,7 @@
             <a:fld id="{81363FC6-F0D5-4376-9B97-08D3CD3871A3}" type="datetimeFigureOut">
               <a:rPr lang="en-US" smtClean="0"/>
               <a:pPr/>
-              <a:t>4/22/2025</a:t>
+              <a:t>4/23/2026</a:t>
             </a:fld>
             <a:endParaRPr lang="en-US"/>
           </a:p>
@@ -1993,7 +1922,7 @@
             <a:fld id="{81363FC6-F0D5-4376-9B97-08D3CD3871A3}" type="datetimeFigureOut">
               <a:rPr lang="en-US" smtClean="0"/>
               <a:pPr/>
-              <a:t>4/22/2025</a:t>
+              <a:t>4/23/2026</a:t>
             </a:fld>
             <a:endParaRPr lang="en-US"/>
           </a:p>
@@ -2235,7 +2164,7 @@
             <a:fld id="{81363FC6-F0D5-4376-9B97-08D3CD3871A3}" type="datetimeFigureOut">
               <a:rPr lang="en-US" smtClean="0"/>
               <a:pPr/>
-              <a:t>4/22/2025</a:t>
+              <a:t>4/23/2026</a:t>
             </a:fld>
             <a:endParaRPr lang="en-US"/>
           </a:p>
@@ -2517,7 +2446,7 @@
             <a:fld id="{81363FC6-F0D5-4376-9B97-08D3CD3871A3}" type="datetimeFigureOut">
               <a:rPr lang="en-US" smtClean="0"/>
               <a:pPr/>
-              <a:t>4/22/2025</a:t>
+              <a:t>4/23/2026</a:t>
             </a:fld>
             <a:endParaRPr lang="en-US"/>
           </a:p>
@@ -2933,7 +2862,7 @@
             <a:fld id="{81363FC6-F0D5-4376-9B97-08D3CD3871A3}" type="datetimeFigureOut">
               <a:rPr lang="en-US" smtClean="0"/>
               <a:pPr/>
-              <a:t>4/22/2025</a:t>
+              <a:t>4/23/2026</a:t>
             </a:fld>
             <a:endParaRPr lang="en-US"/>
           </a:p>
@@ -3047,7 +2976,7 @@
             <a:fld id="{81363FC6-F0D5-4376-9B97-08D3CD3871A3}" type="datetimeFigureOut">
               <a:rPr lang="en-US" smtClean="0"/>
               <a:pPr/>
-              <a:t>4/22/2025</a:t>
+              <a:t>4/23/2026</a:t>
             </a:fld>
             <a:endParaRPr lang="en-US"/>
           </a:p>
@@ -3139,7 +3068,7 @@
             <a:fld id="{81363FC6-F0D5-4376-9B97-08D3CD3871A3}" type="datetimeFigureOut">
               <a:rPr lang="en-US" smtClean="0"/>
               <a:pPr/>
-              <a:t>4/22/2025</a:t>
+              <a:t>4/23/2026</a:t>
             </a:fld>
             <a:endParaRPr lang="en-US"/>
           </a:p>
@@ -3411,7 +3340,7 @@
             <a:fld id="{81363FC6-F0D5-4376-9B97-08D3CD3871A3}" type="datetimeFigureOut">
               <a:rPr lang="en-US" smtClean="0"/>
               <a:pPr/>
-              <a:t>4/22/2025</a:t>
+              <a:t>4/23/2026</a:t>
             </a:fld>
             <a:endParaRPr lang="en-US"/>
           </a:p>
@@ -3660,7 +3589,7 @@
             <a:fld id="{81363FC6-F0D5-4376-9B97-08D3CD3871A3}" type="datetimeFigureOut">
               <a:rPr lang="en-US" smtClean="0"/>
               <a:pPr/>
-              <a:t>4/22/2025</a:t>
+              <a:t>4/23/2026</a:t>
             </a:fld>
             <a:endParaRPr lang="en-US"/>
           </a:p>
@@ -3868,7 +3797,7 @@
             <a:fld id="{81363FC6-F0D5-4376-9B97-08D3CD3871A3}" type="datetimeFigureOut">
               <a:rPr lang="en-US" smtClean="0"/>
               <a:pPr/>
-              <a:t>4/22/2025</a:t>
+              <a:t>4/23/2026</a:t>
             </a:fld>
             <a:endParaRPr lang="en-US"/>
           </a:p>
@@ -4851,6 +4780,200 @@
   <p:cSld>
     <p:spTree>
       <p:nvGrpSpPr>
+        <p:cNvPr id="1" name="">
+          <a:extLst>
+            <a:ext uri="{FF2B5EF4-FFF2-40B4-BE49-F238E27FC236}">
+              <a16:creationId xmlns:a16="http://schemas.microsoft.com/office/drawing/2014/main" id="{391D758D-9AFB-4454-4AA8-F9DD427E9A9B}"/>
+            </a:ext>
+          </a:extLst>
+        </p:cNvPr>
+        <p:cNvGrpSpPr/>
+        <p:nvPr/>
+      </p:nvGrpSpPr>
+      <p:grpSpPr>
+        <a:xfrm>
+          <a:off x="0" y="0"/>
+          <a:ext cx="0" cy="0"/>
+          <a:chOff x="0" y="0"/>
+          <a:chExt cx="0" cy="0"/>
+        </a:xfrm>
+      </p:grpSpPr>
+      <p:sp>
+        <p:nvSpPr>
+          <p:cNvPr id="2" name="Title 1">
+            <a:extLst>
+              <a:ext uri="{FF2B5EF4-FFF2-40B4-BE49-F238E27FC236}">
+                <a16:creationId xmlns:a16="http://schemas.microsoft.com/office/drawing/2014/main" id="{3760C94C-6D3E-44C0-517D-234B12BBB3E1}"/>
+              </a:ext>
+            </a:extLst>
+          </p:cNvPr>
+          <p:cNvSpPr>
+            <a:spLocks noGrp="1"/>
+          </p:cNvSpPr>
+          <p:nvPr>
+            <p:ph type="title"/>
+          </p:nvPr>
+        </p:nvSpPr>
+        <p:spPr/>
+        <p:txBody>
+          <a:bodyPr/>
+          <a:lstStyle/>
+          <a:p>
+            <a:r>
+              <a:rPr lang="en-US" dirty="0"/>
+              <a:t>Question 223.3.8</a:t>
+            </a:r>
+          </a:p>
+        </p:txBody>
+      </p:sp>
+      <p:sp>
+        <p:nvSpPr>
+          <p:cNvPr id="3" name="Content Placeholder 2">
+            <a:extLst>
+              <a:ext uri="{FF2B5EF4-FFF2-40B4-BE49-F238E27FC236}">
+                <a16:creationId xmlns:a16="http://schemas.microsoft.com/office/drawing/2014/main" id="{1FD2476B-A95E-AFF7-964C-69C58A3EB540}"/>
+              </a:ext>
+            </a:extLst>
+          </p:cNvPr>
+          <p:cNvSpPr>
+            <a:spLocks noGrp="1"/>
+          </p:cNvSpPr>
+          <p:nvPr>
+            <p:ph idx="1"/>
+          </p:nvPr>
+        </p:nvSpPr>
+        <p:spPr/>
+        <p:txBody>
+          <a:bodyPr/>
+          <a:lstStyle/>
+          <a:p>
+            <a:pPr marL="0" indent="0">
+              <a:buNone/>
+            </a:pPr>
+            <a:r>
+              <a:rPr lang="en-US"/>
+              <a:t>What does</a:t>
+            </a:r>
+            <a:r>
+              <a:rPr lang="en-US">
+                <a:sym typeface="Symbol" panose="05050102010706020507" pitchFamily="18" charset="2"/>
+              </a:rPr>
+              <a:t></a:t>
+            </a:r>
+            <a:r>
+              <a:rPr lang="en-US"/>
+              <a:t> </a:t>
+            </a:r>
+            <a:r>
+              <a:rPr lang="en-US" dirty="0"/>
+              <a:t>tell us?</a:t>
+            </a:r>
+          </a:p>
+          <a:p>
+            <a:pPr marL="514350" indent="-514350">
+              <a:buFont typeface="+mj-lt"/>
+              <a:buAutoNum type="alphaLcParenR"/>
+            </a:pPr>
+            <a:r>
+              <a:rPr lang="en-US" dirty="0"/>
+              <a:t>How far apart wave crests are in distance</a:t>
+            </a:r>
+          </a:p>
+          <a:p>
+            <a:pPr marL="514350" indent="-514350">
+              <a:buFont typeface="+mj-lt"/>
+              <a:buAutoNum type="alphaLcParenR"/>
+            </a:pPr>
+            <a:r>
+              <a:rPr lang="en-US" dirty="0"/>
+              <a:t>How often we get a wave crest in distance</a:t>
+            </a:r>
+          </a:p>
+          <a:p>
+            <a:pPr marL="514350" indent="-514350">
+              <a:buFont typeface="+mj-lt"/>
+              <a:buAutoNum type="alphaLcParenR"/>
+            </a:pPr>
+            <a:r>
+              <a:rPr lang="en-US" dirty="0"/>
+              <a:t>How far apart wave crests are in time</a:t>
+            </a:r>
+          </a:p>
+          <a:p>
+            <a:pPr marL="514350" indent="-514350">
+              <a:buFont typeface="+mj-lt"/>
+              <a:buAutoNum type="alphaLcParenR"/>
+            </a:pPr>
+            <a:r>
+              <a:rPr lang="en-US" dirty="0"/>
+              <a:t>How often we get a wave crest in time</a:t>
+            </a:r>
+          </a:p>
+          <a:p>
+            <a:pPr marL="514350" indent="-514350">
+              <a:buFont typeface="+mj-lt"/>
+              <a:buAutoNum type="alphaLcParenR"/>
+            </a:pPr>
+            <a:r>
+              <a:rPr lang="en-US" dirty="0"/>
+              <a:t>Nothing</a:t>
+            </a:r>
+          </a:p>
+        </p:txBody>
+      </p:sp>
+      <p:sp>
+        <p:nvSpPr>
+          <p:cNvPr id="4" name="Slide Number Placeholder 3">
+            <a:extLst>
+              <a:ext uri="{FF2B5EF4-FFF2-40B4-BE49-F238E27FC236}">
+                <a16:creationId xmlns:a16="http://schemas.microsoft.com/office/drawing/2014/main" id="{3AD54FD9-7F3B-C471-C0C6-6689E29F4DCF}"/>
+              </a:ext>
+            </a:extLst>
+          </p:cNvPr>
+          <p:cNvSpPr>
+            <a:spLocks noGrp="1"/>
+          </p:cNvSpPr>
+          <p:nvPr>
+            <p:ph type="sldNum" sz="quarter" idx="12"/>
+          </p:nvPr>
+        </p:nvSpPr>
+        <p:spPr/>
+        <p:txBody>
+          <a:bodyPr/>
+          <a:lstStyle/>
+          <a:p>
+            <a:pPr>
+              <a:defRPr/>
+            </a:pPr>
+            <a:fld id="{64137B81-8888-4253-92EC-0AED2A590749}" type="slidenum">
+              <a:rPr lang="en-US" smtClean="0"/>
+              <a:pPr>
+                <a:defRPr/>
+              </a:pPr>
+              <a:t>14</a:t>
+            </a:fld>
+            <a:endParaRPr lang="en-US"/>
+          </a:p>
+        </p:txBody>
+      </p:sp>
+    </p:spTree>
+    <p:extLst>
+      <p:ext uri="{BB962C8B-B14F-4D97-AF65-F5344CB8AC3E}">
+        <p14:creationId xmlns:p14="http://schemas.microsoft.com/office/powerpoint/2010/main" val="4029346737"/>
+      </p:ext>
+    </p:extLst>
+  </p:cSld>
+  <p:clrMapOvr>
+    <a:masterClrMapping/>
+  </p:clrMapOvr>
+</p:sld>
+</file>
+
+<file path=ppt/slides/slide15.xml><?xml version="1.0" encoding="utf-8"?>
+<p:sld xmlns:a="http://schemas.openxmlformats.org/drawingml/2006/main" xmlns:r="http://schemas.openxmlformats.org/officeDocument/2006/relationships" xmlns:p="http://schemas.openxmlformats.org/presentationml/2006/main">
+  <p:cSld>
+    <p:spTree>
+      <p:nvGrpSpPr>
         <p:cNvPr id="1" name=""/>
         <p:cNvGrpSpPr/>
         <p:nvPr/>
@@ -4983,7 +5106,7 @@
               <a:pPr>
                 <a:defRPr/>
               </a:pPr>
-              <a:t>14</a:t>
+              <a:t>15</a:t>
             </a:fld>
             <a:endParaRPr lang="en-US"/>
           </a:p>
@@ -5002,7 +5125,7 @@
 </p:sld>
 </file>
 
-<file path=ppt/slides/slide15.xml><?xml version="1.0" encoding="utf-8"?>
+<file path=ppt/slides/slide16.xml><?xml version="1.0" encoding="utf-8"?>
 <p:sld xmlns:a="http://schemas.openxmlformats.org/drawingml/2006/main" xmlns:r="http://schemas.openxmlformats.org/officeDocument/2006/relationships" xmlns:p="http://schemas.openxmlformats.org/presentationml/2006/main">
   <p:cSld>
     <p:spTree>
@@ -5087,7 +5210,7 @@
             <a:fld id="{99C4FF6E-0BC5-4353-B174-029A48221FCC}" type="slidenum">
               <a:rPr lang="en-US" smtClean="0"/>
               <a:pPr/>
-              <a:t>15</a:t>
+              <a:t>16</a:t>
             </a:fld>
             <a:endParaRPr lang="en-US"/>
           </a:p>
@@ -5486,7 +5609,7 @@
 </p:sld>
 </file>
 
-<file path=ppt/slides/slide16.xml><?xml version="1.0" encoding="utf-8"?>
+<file path=ppt/slides/slide17.xml><?xml version="1.0" encoding="utf-8"?>
 <p:sld xmlns:a="http://schemas.openxmlformats.org/drawingml/2006/main" xmlns:r="http://schemas.openxmlformats.org/officeDocument/2006/relationships" xmlns:p="http://schemas.openxmlformats.org/presentationml/2006/main">
   <p:cSld>
     <p:spTree>
@@ -5571,7 +5694,7 @@
             <a:fld id="{BC2515EE-4685-49E6-8473-10370292C8B7}" type="slidenum">
               <a:rPr lang="en-US" smtClean="0"/>
               <a:pPr/>
-              <a:t>16</a:t>
+              <a:t>17</a:t>
             </a:fld>
             <a:endParaRPr lang="en-US"/>
           </a:p>
@@ -6251,7 +6374,7 @@
 </p:sld>
 </file>
 
-<file path=ppt/slides/slide17.xml><?xml version="1.0" encoding="utf-8"?>
+<file path=ppt/slides/slide18.xml><?xml version="1.0" encoding="utf-8"?>
 <p:sld xmlns:a="http://schemas.openxmlformats.org/drawingml/2006/main" xmlns:r="http://schemas.openxmlformats.org/officeDocument/2006/relationships" xmlns:p="http://schemas.openxmlformats.org/presentationml/2006/main">
   <p:cSld>
     <p:spTree>
@@ -6370,7 +6493,7 @@
 </p:sld>
 </file>
 
-<file path=ppt/slides/slide18.xml><?xml version="1.0" encoding="utf-8"?>
+<file path=ppt/slides/slide19.xml><?xml version="1.0" encoding="utf-8"?>
 <p:sld xmlns:a="http://schemas.openxmlformats.org/drawingml/2006/main" xmlns:r="http://schemas.openxmlformats.org/officeDocument/2006/relationships" xmlns:p="http://schemas.openxmlformats.org/presentationml/2006/main">
   <p:cSld>
     <p:spTree>
@@ -6578,7 +6701,239 @@
 </p:sld>
 </file>
 
-<file path=ppt/slides/slide19.xml><?xml version="1.0" encoding="utf-8"?>
+<file path=ppt/slides/slide2.xml><?xml version="1.0" encoding="utf-8"?>
+<p:sld xmlns:a="http://schemas.openxmlformats.org/drawingml/2006/main" xmlns:r="http://schemas.openxmlformats.org/officeDocument/2006/relationships" xmlns:p="http://schemas.openxmlformats.org/presentationml/2006/main">
+  <p:cSld>
+    <p:spTree>
+      <p:nvGrpSpPr>
+        <p:cNvPr id="1" name=""/>
+        <p:cNvGrpSpPr/>
+        <p:nvPr/>
+      </p:nvGrpSpPr>
+      <p:grpSpPr>
+        <a:xfrm>
+          <a:off x="0" y="0"/>
+          <a:ext cx="0" cy="0"/>
+          <a:chOff x="0" y="0"/>
+          <a:chExt cx="0" cy="0"/>
+        </a:xfrm>
+      </p:grpSpPr>
+      <p:sp>
+        <p:nvSpPr>
+          <p:cNvPr id="49154" name="Date Placeholder 3"/>
+          <p:cNvSpPr>
+            <a:spLocks noGrp="1"/>
+          </p:cNvSpPr>
+          <p:nvPr>
+            <p:ph type="dt" sz="quarter" idx="10"/>
+          </p:nvPr>
+        </p:nvSpPr>
+        <p:spPr>
+          <a:noFill/>
+        </p:spPr>
+        <p:txBody>
+          <a:bodyPr/>
+          <a:lstStyle/>
+          <a:p>
+            <a:r>
+              <a:rPr lang="en-US"/>
+              <a:t>Winter 2007</a:t>
+            </a:r>
+          </a:p>
+        </p:txBody>
+      </p:sp>
+      <p:sp>
+        <p:nvSpPr>
+          <p:cNvPr id="49155" name="Footer Placeholder 4"/>
+          <p:cNvSpPr>
+            <a:spLocks noGrp="1"/>
+          </p:cNvSpPr>
+          <p:nvPr>
+            <p:ph type="ftr" sz="quarter" idx="11"/>
+          </p:nvPr>
+        </p:nvSpPr>
+        <p:spPr>
+          <a:noFill/>
+        </p:spPr>
+        <p:txBody>
+          <a:bodyPr/>
+          <a:lstStyle/>
+          <a:p>
+            <a:r>
+              <a:rPr lang="en-US"/>
+              <a:t>R. Todd Lines</a:t>
+            </a:r>
+          </a:p>
+        </p:txBody>
+      </p:sp>
+      <p:sp>
+        <p:nvSpPr>
+          <p:cNvPr id="49156" name="Slide Number Placeholder 5"/>
+          <p:cNvSpPr>
+            <a:spLocks noGrp="1"/>
+          </p:cNvSpPr>
+          <p:nvPr>
+            <p:ph type="sldNum" sz="quarter" idx="12"/>
+          </p:nvPr>
+        </p:nvSpPr>
+        <p:spPr>
+          <a:noFill/>
+        </p:spPr>
+        <p:txBody>
+          <a:bodyPr/>
+          <a:lstStyle/>
+          <a:p>
+            <a:fld id="{F49D2939-641E-4F08-8F10-3E88662DB609}" type="slidenum">
+              <a:rPr lang="en-US" smtClean="0"/>
+              <a:pPr/>
+              <a:t>2</a:t>
+            </a:fld>
+            <a:endParaRPr lang="en-US"/>
+          </a:p>
+        </p:txBody>
+      </p:sp>
+      <p:sp>
+        <p:nvSpPr>
+          <p:cNvPr id="49157" name="Rectangle 2"/>
+          <p:cNvSpPr>
+            <a:spLocks noGrp="1" noChangeArrowheads="1"/>
+          </p:cNvSpPr>
+          <p:nvPr>
+            <p:ph type="title"/>
+          </p:nvPr>
+        </p:nvSpPr>
+        <p:spPr/>
+        <p:txBody>
+          <a:bodyPr/>
+          <a:lstStyle/>
+          <a:p>
+            <a:pPr eaLnBrk="1" hangingPunct="1"/>
+            <a:r>
+              <a:rPr lang="en-US"/>
+              <a:t>Sinusoidal Waves</a:t>
+            </a:r>
+          </a:p>
+        </p:txBody>
+      </p:sp>
+      <p:sp>
+        <p:nvSpPr>
+          <p:cNvPr id="49158" name="Rectangle 3"/>
+          <p:cNvSpPr>
+            <a:spLocks noGrp="1" noChangeArrowheads="1"/>
+          </p:cNvSpPr>
+          <p:nvPr>
+            <p:ph type="body" idx="1"/>
+          </p:nvPr>
+        </p:nvSpPr>
+        <p:spPr>
+          <a:xfrm>
+            <a:off x="442913" y="1427163"/>
+            <a:ext cx="4165600" cy="4525962"/>
+          </a:xfrm>
+        </p:spPr>
+        <p:txBody>
+          <a:bodyPr/>
+          <a:lstStyle/>
+          <a:p>
+            <a:pPr eaLnBrk="1" hangingPunct="1">
+              <a:lnSpc>
+                <a:spcPct val="90000"/>
+              </a:lnSpc>
+            </a:pPr>
+            <a:r>
+              <a:rPr lang="en-US" sz="2400"/>
+              <a:t>A continuous wave can be created by shaking the end of the string in simple harmonic motion</a:t>
+            </a:r>
+          </a:p>
+          <a:p>
+            <a:pPr eaLnBrk="1" hangingPunct="1">
+              <a:lnSpc>
+                <a:spcPct val="90000"/>
+              </a:lnSpc>
+            </a:pPr>
+            <a:r>
+              <a:rPr lang="en-US" sz="2400"/>
+              <a:t>The shape of the wave is called </a:t>
+            </a:r>
+            <a:r>
+              <a:rPr lang="en-US" sz="2400" b="1"/>
+              <a:t>sinusoidal</a:t>
+            </a:r>
+            <a:r>
+              <a:rPr lang="en-US" sz="2400"/>
+              <a:t> since the waveform is that of a sine curve</a:t>
+            </a:r>
+          </a:p>
+          <a:p>
+            <a:pPr eaLnBrk="1" hangingPunct="1">
+              <a:lnSpc>
+                <a:spcPct val="90000"/>
+              </a:lnSpc>
+            </a:pPr>
+            <a:r>
+              <a:rPr lang="en-US" sz="2400"/>
+              <a:t>The shape remains the same but moves</a:t>
+            </a:r>
+          </a:p>
+          <a:p>
+            <a:pPr lvl="1" eaLnBrk="1" hangingPunct="1">
+              <a:lnSpc>
+                <a:spcPct val="90000"/>
+              </a:lnSpc>
+            </a:pPr>
+            <a:r>
+              <a:rPr lang="en-US" sz="2000"/>
+              <a:t>Toward the right in the text diagrams</a:t>
+            </a:r>
+          </a:p>
+        </p:txBody>
+      </p:sp>
+      <p:pic>
+        <p:nvPicPr>
+          <p:cNvPr id="49159" name="Picture 4"/>
+          <p:cNvPicPr>
+            <a:picLocks noChangeAspect="1" noChangeArrowheads="1"/>
+          </p:cNvPicPr>
+          <p:nvPr/>
+        </p:nvPicPr>
+        <p:blipFill>
+          <a:blip r:embed="rId2" cstate="print"/>
+          <a:srcRect/>
+          <a:stretch>
+            <a:fillRect/>
+          </a:stretch>
+        </p:blipFill>
+        <p:spPr bwMode="auto">
+          <a:xfrm>
+            <a:off x="5181600" y="1408113"/>
+            <a:ext cx="3662363" cy="2992437"/>
+          </a:xfrm>
+          <a:prstGeom prst="rect">
+            <a:avLst/>
+          </a:prstGeom>
+          <a:noFill/>
+          <a:ln w="9525">
+            <a:noFill/>
+            <a:miter lim="800000"/>
+            <a:headEnd/>
+            <a:tailEnd/>
+          </a:ln>
+        </p:spPr>
+      </p:pic>
+    </p:spTree>
+    <p:extLst>
+      <p:ext uri="{BB962C8B-B14F-4D97-AF65-F5344CB8AC3E}">
+        <p14:creationId xmlns:p14="http://schemas.microsoft.com/office/powerpoint/2010/main" val="2540087810"/>
+      </p:ext>
+    </p:extLst>
+  </p:cSld>
+  <p:clrMapOvr>
+    <a:masterClrMapping/>
+  </p:clrMapOvr>
+</p:sld>
+</file>
+
+<file path=ppt/slides/slide20.xml><?xml version="1.0" encoding="utf-8"?>
 <p:sld xmlns:a="http://schemas.openxmlformats.org/drawingml/2006/main" xmlns:r="http://schemas.openxmlformats.org/officeDocument/2006/relationships" xmlns:p="http://schemas.openxmlformats.org/presentationml/2006/main">
   <p:cSld>
     <p:spTree>
@@ -6800,239 +7155,7 @@
 </p:sld>
 </file>
 
-<file path=ppt/slides/slide2.xml><?xml version="1.0" encoding="utf-8"?>
-<p:sld xmlns:a="http://schemas.openxmlformats.org/drawingml/2006/main" xmlns:r="http://schemas.openxmlformats.org/officeDocument/2006/relationships" xmlns:p="http://schemas.openxmlformats.org/presentationml/2006/main">
-  <p:cSld>
-    <p:spTree>
-      <p:nvGrpSpPr>
-        <p:cNvPr id="1" name=""/>
-        <p:cNvGrpSpPr/>
-        <p:nvPr/>
-      </p:nvGrpSpPr>
-      <p:grpSpPr>
-        <a:xfrm>
-          <a:off x="0" y="0"/>
-          <a:ext cx="0" cy="0"/>
-          <a:chOff x="0" y="0"/>
-          <a:chExt cx="0" cy="0"/>
-        </a:xfrm>
-      </p:grpSpPr>
-      <p:sp>
-        <p:nvSpPr>
-          <p:cNvPr id="49154" name="Date Placeholder 3"/>
-          <p:cNvSpPr>
-            <a:spLocks noGrp="1"/>
-          </p:cNvSpPr>
-          <p:nvPr>
-            <p:ph type="dt" sz="quarter" idx="10"/>
-          </p:nvPr>
-        </p:nvSpPr>
-        <p:spPr>
-          <a:noFill/>
-        </p:spPr>
-        <p:txBody>
-          <a:bodyPr/>
-          <a:lstStyle/>
-          <a:p>
-            <a:r>
-              <a:rPr lang="en-US"/>
-              <a:t>Winter 2007</a:t>
-            </a:r>
-          </a:p>
-        </p:txBody>
-      </p:sp>
-      <p:sp>
-        <p:nvSpPr>
-          <p:cNvPr id="49155" name="Footer Placeholder 4"/>
-          <p:cNvSpPr>
-            <a:spLocks noGrp="1"/>
-          </p:cNvSpPr>
-          <p:nvPr>
-            <p:ph type="ftr" sz="quarter" idx="11"/>
-          </p:nvPr>
-        </p:nvSpPr>
-        <p:spPr>
-          <a:noFill/>
-        </p:spPr>
-        <p:txBody>
-          <a:bodyPr/>
-          <a:lstStyle/>
-          <a:p>
-            <a:r>
-              <a:rPr lang="en-US"/>
-              <a:t>R. Todd Lines</a:t>
-            </a:r>
-          </a:p>
-        </p:txBody>
-      </p:sp>
-      <p:sp>
-        <p:nvSpPr>
-          <p:cNvPr id="49156" name="Slide Number Placeholder 5"/>
-          <p:cNvSpPr>
-            <a:spLocks noGrp="1"/>
-          </p:cNvSpPr>
-          <p:nvPr>
-            <p:ph type="sldNum" sz="quarter" idx="12"/>
-          </p:nvPr>
-        </p:nvSpPr>
-        <p:spPr>
-          <a:noFill/>
-        </p:spPr>
-        <p:txBody>
-          <a:bodyPr/>
-          <a:lstStyle/>
-          <a:p>
-            <a:fld id="{F49D2939-641E-4F08-8F10-3E88662DB609}" type="slidenum">
-              <a:rPr lang="en-US" smtClean="0"/>
-              <a:pPr/>
-              <a:t>2</a:t>
-            </a:fld>
-            <a:endParaRPr lang="en-US"/>
-          </a:p>
-        </p:txBody>
-      </p:sp>
-      <p:sp>
-        <p:nvSpPr>
-          <p:cNvPr id="49157" name="Rectangle 2"/>
-          <p:cNvSpPr>
-            <a:spLocks noGrp="1" noChangeArrowheads="1"/>
-          </p:cNvSpPr>
-          <p:nvPr>
-            <p:ph type="title"/>
-          </p:nvPr>
-        </p:nvSpPr>
-        <p:spPr/>
-        <p:txBody>
-          <a:bodyPr/>
-          <a:lstStyle/>
-          <a:p>
-            <a:pPr eaLnBrk="1" hangingPunct="1"/>
-            <a:r>
-              <a:rPr lang="en-US"/>
-              <a:t>Sinusoidal Waves</a:t>
-            </a:r>
-          </a:p>
-        </p:txBody>
-      </p:sp>
-      <p:sp>
-        <p:nvSpPr>
-          <p:cNvPr id="49158" name="Rectangle 3"/>
-          <p:cNvSpPr>
-            <a:spLocks noGrp="1" noChangeArrowheads="1"/>
-          </p:cNvSpPr>
-          <p:nvPr>
-            <p:ph type="body" idx="1"/>
-          </p:nvPr>
-        </p:nvSpPr>
-        <p:spPr>
-          <a:xfrm>
-            <a:off x="442913" y="1427163"/>
-            <a:ext cx="4165600" cy="4525962"/>
-          </a:xfrm>
-        </p:spPr>
-        <p:txBody>
-          <a:bodyPr/>
-          <a:lstStyle/>
-          <a:p>
-            <a:pPr eaLnBrk="1" hangingPunct="1">
-              <a:lnSpc>
-                <a:spcPct val="90000"/>
-              </a:lnSpc>
-            </a:pPr>
-            <a:r>
-              <a:rPr lang="en-US" sz="2400"/>
-              <a:t>A continuous wave can be created by shaking the end of the string in simple harmonic motion</a:t>
-            </a:r>
-          </a:p>
-          <a:p>
-            <a:pPr eaLnBrk="1" hangingPunct="1">
-              <a:lnSpc>
-                <a:spcPct val="90000"/>
-              </a:lnSpc>
-            </a:pPr>
-            <a:r>
-              <a:rPr lang="en-US" sz="2400"/>
-              <a:t>The shape of the wave is called </a:t>
-            </a:r>
-            <a:r>
-              <a:rPr lang="en-US" sz="2400" b="1"/>
-              <a:t>sinusoidal</a:t>
-            </a:r>
-            <a:r>
-              <a:rPr lang="en-US" sz="2400"/>
-              <a:t> since the waveform is that of a sine curve</a:t>
-            </a:r>
-          </a:p>
-          <a:p>
-            <a:pPr eaLnBrk="1" hangingPunct="1">
-              <a:lnSpc>
-                <a:spcPct val="90000"/>
-              </a:lnSpc>
-            </a:pPr>
-            <a:r>
-              <a:rPr lang="en-US" sz="2400"/>
-              <a:t>The shape remains the same but moves</a:t>
-            </a:r>
-          </a:p>
-          <a:p>
-            <a:pPr lvl="1" eaLnBrk="1" hangingPunct="1">
-              <a:lnSpc>
-                <a:spcPct val="90000"/>
-              </a:lnSpc>
-            </a:pPr>
-            <a:r>
-              <a:rPr lang="en-US" sz="2000"/>
-              <a:t>Toward the right in the text diagrams</a:t>
-            </a:r>
-          </a:p>
-        </p:txBody>
-      </p:sp>
-      <p:pic>
-        <p:nvPicPr>
-          <p:cNvPr id="49159" name="Picture 4"/>
-          <p:cNvPicPr>
-            <a:picLocks noChangeAspect="1" noChangeArrowheads="1"/>
-          </p:cNvPicPr>
-          <p:nvPr/>
-        </p:nvPicPr>
-        <p:blipFill>
-          <a:blip r:embed="rId2" cstate="print"/>
-          <a:srcRect/>
-          <a:stretch>
-            <a:fillRect/>
-          </a:stretch>
-        </p:blipFill>
-        <p:spPr bwMode="auto">
-          <a:xfrm>
-            <a:off x="5181600" y="1408113"/>
-            <a:ext cx="3662363" cy="2992437"/>
-          </a:xfrm>
-          <a:prstGeom prst="rect">
-            <a:avLst/>
-          </a:prstGeom>
-          <a:noFill/>
-          <a:ln w="9525">
-            <a:noFill/>
-            <a:miter lim="800000"/>
-            <a:headEnd/>
-            <a:tailEnd/>
-          </a:ln>
-        </p:spPr>
-      </p:pic>
-    </p:spTree>
-    <p:extLst>
-      <p:ext uri="{BB962C8B-B14F-4D97-AF65-F5344CB8AC3E}">
-        <p14:creationId xmlns:p14="http://schemas.microsoft.com/office/powerpoint/2010/main" val="2540087810"/>
-      </p:ext>
-    </p:extLst>
-  </p:cSld>
-  <p:clrMapOvr>
-    <a:masterClrMapping/>
-  </p:clrMapOvr>
-</p:sld>
-</file>
-
-<file path=ppt/slides/slide20.xml><?xml version="1.0" encoding="utf-8"?>
+<file path=ppt/slides/slide21.xml><?xml version="1.0" encoding="utf-8"?>
 <p:sld xmlns:a="http://schemas.openxmlformats.org/drawingml/2006/main" xmlns:r="http://schemas.openxmlformats.org/officeDocument/2006/relationships" xmlns:p="http://schemas.openxmlformats.org/presentationml/2006/main">
   <p:cSld>
     <p:spTree>
@@ -7124,7 +7247,7 @@
 </p:sld>
 </file>
 
-<file path=ppt/slides/slide21.xml><?xml version="1.0" encoding="utf-8"?>
+<file path=ppt/slides/slide22.xml><?xml version="1.0" encoding="utf-8"?>
 <p:sld xmlns:a="http://schemas.openxmlformats.org/drawingml/2006/main" xmlns:r="http://schemas.openxmlformats.org/officeDocument/2006/relationships" xmlns:p="http://schemas.openxmlformats.org/presentationml/2006/main">
   <p:cSld>
     <p:spTree>
@@ -7258,7 +7381,7 @@
               <a:pPr>
                 <a:defRPr/>
               </a:pPr>
-              <a:t>21</a:t>
+              <a:t>22</a:t>
             </a:fld>
             <a:endParaRPr lang="en-US"/>
           </a:p>
@@ -7277,7 +7400,7 @@
 </p:sld>
 </file>
 
-<file path=ppt/slides/slide22.xml><?xml version="1.0" encoding="utf-8"?>
+<file path=ppt/slides/slide23.xml><?xml version="1.0" encoding="utf-8"?>
 <p:sld xmlns:a="http://schemas.openxmlformats.org/drawingml/2006/main" xmlns:r="http://schemas.openxmlformats.org/officeDocument/2006/relationships" xmlns:p="http://schemas.openxmlformats.org/presentationml/2006/main">
   <p:cSld>
     <p:spTree>
@@ -7583,7 +7706,7 @@
 </p:sld>
 </file>
 
-<file path=ppt/slides/slide23.xml><?xml version="1.0" encoding="utf-8"?>
+<file path=ppt/slides/slide24.xml><?xml version="1.0" encoding="utf-8"?>
 <p:sld xmlns:a="http://schemas.openxmlformats.org/drawingml/2006/main" xmlns:r="http://schemas.openxmlformats.org/officeDocument/2006/relationships" xmlns:p="http://schemas.openxmlformats.org/presentationml/2006/main">
   <p:cSld>
     <p:spTree>
@@ -7883,7 +8006,7 @@
 </p:sld>
 </file>
 
-<file path=ppt/slides/slide24.xml><?xml version="1.0" encoding="utf-8"?>
+<file path=ppt/slides/slide25.xml><?xml version="1.0" encoding="utf-8"?>
 <p:sld xmlns:a="http://schemas.openxmlformats.org/drawingml/2006/main" xmlns:r="http://schemas.openxmlformats.org/officeDocument/2006/relationships" xmlns:p="http://schemas.openxmlformats.org/presentationml/2006/main">
   <p:cSld>
     <p:spTree>
@@ -8001,7 +8124,7 @@
               <a:pPr>
                 <a:defRPr/>
               </a:pPr>
-              <a:t>24</a:t>
+              <a:t>25</a:t>
             </a:fld>
             <a:endParaRPr lang="en-US"/>
           </a:p>
@@ -8020,7 +8143,7 @@
 </p:sld>
 </file>
 
-<file path=ppt/slides/slide25.xml><?xml version="1.0" encoding="utf-8"?>
+<file path=ppt/slides/slide26.xml><?xml version="1.0" encoding="utf-8"?>
 <p:sld xmlns:a="http://schemas.openxmlformats.org/drawingml/2006/main" xmlns:r="http://schemas.openxmlformats.org/officeDocument/2006/relationships" xmlns:p="http://schemas.openxmlformats.org/presentationml/2006/main">
   <p:cSld>
     <p:spTree>
@@ -8130,7 +8253,7 @@
 </p:sld>
 </file>
 
-<file path=ppt/slides/slide26.xml><?xml version="1.0" encoding="utf-8"?>
+<file path=ppt/slides/slide27.xml><?xml version="1.0" encoding="utf-8"?>
 <p:sld xmlns:a="http://schemas.openxmlformats.org/drawingml/2006/main" xmlns:r="http://schemas.openxmlformats.org/officeDocument/2006/relationships" xmlns:p="http://schemas.openxmlformats.org/presentationml/2006/main">
   <p:cSld>
     <p:spTree>
@@ -8373,7 +8496,7 @@
 </p:sld>
 </file>
 
-<file path=ppt/slides/slide27.xml><?xml version="1.0" encoding="utf-8"?>
+<file path=ppt/slides/slide28.xml><?xml version="1.0" encoding="utf-8"?>
 <p:sld xmlns:a="http://schemas.openxmlformats.org/drawingml/2006/main" xmlns:r="http://schemas.openxmlformats.org/officeDocument/2006/relationships" xmlns:p="http://schemas.openxmlformats.org/presentationml/2006/main">
   <p:cSld>
     <p:spTree>
@@ -8447,148 +8570,6 @@
     <p:extLst>
       <p:ext uri="{BB962C8B-B14F-4D97-AF65-F5344CB8AC3E}">
         <p14:creationId xmlns:p14="http://schemas.microsoft.com/office/powerpoint/2010/main" val="2180201229"/>
-      </p:ext>
-    </p:extLst>
-  </p:cSld>
-  <p:clrMapOvr>
-    <a:masterClrMapping/>
-  </p:clrMapOvr>
-</p:sld>
-</file>
-
-<file path=ppt/slides/slide28.xml><?xml version="1.0" encoding="utf-8"?>
-<p:sld xmlns:a="http://schemas.openxmlformats.org/drawingml/2006/main" xmlns:r="http://schemas.openxmlformats.org/officeDocument/2006/relationships" xmlns:p="http://schemas.openxmlformats.org/presentationml/2006/main">
-  <p:cSld>
-    <p:spTree>
-      <p:nvGrpSpPr>
-        <p:cNvPr id="1" name=""/>
-        <p:cNvGrpSpPr/>
-        <p:nvPr/>
-      </p:nvGrpSpPr>
-      <p:grpSpPr>
-        <a:xfrm>
-          <a:off x="0" y="0"/>
-          <a:ext cx="0" cy="0"/>
-          <a:chOff x="0" y="0"/>
-          <a:chExt cx="0" cy="0"/>
-        </a:xfrm>
-      </p:grpSpPr>
-      <p:sp>
-        <p:nvSpPr>
-          <p:cNvPr id="2" name="Title 1"/>
-          <p:cNvSpPr>
-            <a:spLocks noGrp="1"/>
-          </p:cNvSpPr>
-          <p:nvPr>
-            <p:ph type="title"/>
-          </p:nvPr>
-        </p:nvSpPr>
-        <p:spPr/>
-        <p:txBody>
-          <a:bodyPr/>
-          <a:lstStyle/>
-          <a:p>
-            <a:r>
-              <a:rPr lang="en-US" dirty="0"/>
-              <a:t>Question 223.4.0.1</a:t>
-            </a:r>
-          </a:p>
-        </p:txBody>
-      </p:sp>
-      <p:sp>
-        <p:nvSpPr>
-          <p:cNvPr id="3" name="Content Placeholder 2"/>
-          <p:cNvSpPr>
-            <a:spLocks noGrp="1"/>
-          </p:cNvSpPr>
-          <p:nvPr>
-            <p:ph idx="1"/>
-          </p:nvPr>
-        </p:nvSpPr>
-        <p:spPr/>
-        <p:txBody>
-          <a:bodyPr/>
-          <a:lstStyle/>
-          <a:p>
-            <a:pPr marL="0" indent="0">
-              <a:buNone/>
-            </a:pPr>
-            <a:r>
-              <a:rPr lang="en-US" dirty="0"/>
-              <a:t>For sound waves, what is a compression?</a:t>
-            </a:r>
-          </a:p>
-          <a:p>
-            <a:pPr marL="514350" indent="-514350">
-              <a:buAutoNum type="alphaLcParenR"/>
-            </a:pPr>
-            <a:r>
-              <a:rPr lang="en-US" dirty="0"/>
-              <a:t>It is a region of higher pressure</a:t>
-            </a:r>
-          </a:p>
-          <a:p>
-            <a:pPr marL="514350" indent="-514350">
-              <a:buAutoNum type="alphaLcParenR"/>
-            </a:pPr>
-            <a:r>
-              <a:rPr lang="en-US" dirty="0"/>
-              <a:t>It is a region of lower pressure</a:t>
-            </a:r>
-          </a:p>
-          <a:p>
-            <a:pPr marL="514350" indent="-514350">
-              <a:buAutoNum type="alphaLcParenR"/>
-            </a:pPr>
-            <a:r>
-              <a:rPr lang="en-US" dirty="0"/>
-              <a:t>It is an area over which a force is applied</a:t>
-            </a:r>
-          </a:p>
-          <a:p>
-            <a:pPr marL="514350" indent="-514350">
-              <a:buAutoNum type="alphaLcParenR"/>
-            </a:pPr>
-            <a:r>
-              <a:rPr lang="en-US" dirty="0"/>
-              <a:t>It refers to the collision time of molecules</a:t>
-            </a:r>
-          </a:p>
-        </p:txBody>
-      </p:sp>
-      <p:sp>
-        <p:nvSpPr>
-          <p:cNvPr id="4" name="Slide Number Placeholder 3"/>
-          <p:cNvSpPr>
-            <a:spLocks noGrp="1"/>
-          </p:cNvSpPr>
-          <p:nvPr>
-            <p:ph type="sldNum" sz="quarter" idx="12"/>
-          </p:nvPr>
-        </p:nvSpPr>
-        <p:spPr/>
-        <p:txBody>
-          <a:bodyPr/>
-          <a:lstStyle/>
-          <a:p>
-            <a:pPr>
-              <a:defRPr/>
-            </a:pPr>
-            <a:fld id="{64137B81-8888-4253-92EC-0AED2A590749}" type="slidenum">
-              <a:rPr lang="en-US" smtClean="0"/>
-              <a:pPr>
-                <a:defRPr/>
-              </a:pPr>
-              <a:t>28</a:t>
-            </a:fld>
-            <a:endParaRPr lang="en-US"/>
-          </a:p>
-        </p:txBody>
-      </p:sp>
-    </p:spTree>
-    <p:extLst>
-      <p:ext uri="{BB962C8B-B14F-4D97-AF65-F5344CB8AC3E}">
-        <p14:creationId xmlns:p14="http://schemas.microsoft.com/office/powerpoint/2010/main" val="935147946"/>
       </p:ext>
     </p:extLst>
   </p:cSld>
@@ -8632,7 +8613,7 @@
           <a:p>
             <a:r>
               <a:rPr lang="en-US" dirty="0"/>
-              <a:t>Question 223.4.0.2</a:t>
+              <a:t>Question 223.4.0.1</a:t>
             </a:r>
           </a:p>
         </p:txBody>
@@ -8657,7 +8638,7 @@
             </a:pPr>
             <a:r>
               <a:rPr lang="en-US" dirty="0"/>
-              <a:t>For sound waves, a compression is a high pressure region, what do we call a low pressure region?</a:t>
+              <a:t>For sound waves, what is a compression?</a:t>
             </a:r>
           </a:p>
           <a:p>
@@ -8666,7 +8647,7 @@
             </a:pPr>
             <a:r>
               <a:rPr lang="en-US" dirty="0"/>
-              <a:t>Low pressure region</a:t>
+              <a:t>It is a region of higher pressure</a:t>
             </a:r>
           </a:p>
           <a:p>
@@ -8675,23 +8656,8 @@
             </a:pPr>
             <a:r>
               <a:rPr lang="en-US" dirty="0"/>
-              <a:t>Pressure </a:t>
+              <a:t>It is a region of lower pressure</a:t>
             </a:r>
-            <a:r>
-              <a:rPr lang="en-US" dirty="0" err="1"/>
-              <a:t>minimimization</a:t>
-            </a:r>
-            <a:endParaRPr lang="en-US" dirty="0"/>
-          </a:p>
-          <a:p>
-            <a:pPr marL="514350" indent="-514350">
-              <a:buAutoNum type="alphaLcParenR"/>
-            </a:pPr>
-            <a:r>
-              <a:rPr lang="en-US" dirty="0" err="1"/>
-              <a:t>hypopresurization</a:t>
-            </a:r>
-            <a:endParaRPr lang="en-US" dirty="0"/>
           </a:p>
           <a:p>
             <a:pPr marL="514350" indent="-514350">
@@ -8699,7 +8665,16 @@
             </a:pPr>
             <a:r>
               <a:rPr lang="en-US" dirty="0"/>
-              <a:t>Rarefaction</a:t>
+              <a:t>It is an area over which a force is applied</a:t>
+            </a:r>
+          </a:p>
+          <a:p>
+            <a:pPr marL="514350" indent="-514350">
+              <a:buAutoNum type="alphaLcParenR"/>
+            </a:pPr>
+            <a:r>
+              <a:rPr lang="en-US" dirty="0"/>
+              <a:t>It refers to the collision time of molecules</a:t>
             </a:r>
           </a:p>
         </p:txBody>
@@ -8736,7 +8711,7 @@
     </p:spTree>
     <p:extLst>
       <p:ext uri="{BB962C8B-B14F-4D97-AF65-F5344CB8AC3E}">
-        <p14:creationId xmlns:p14="http://schemas.microsoft.com/office/powerpoint/2010/main" val="43803941"/>
+        <p14:creationId xmlns:p14="http://schemas.microsoft.com/office/powerpoint/2010/main" val="935147946"/>
       </p:ext>
     </p:extLst>
   </p:cSld>
@@ -8892,6 +8867,154 @@
 </file>
 
 <file path=ppt/slides/slide30.xml><?xml version="1.0" encoding="utf-8"?>
+<p:sld xmlns:a="http://schemas.openxmlformats.org/drawingml/2006/main" xmlns:r="http://schemas.openxmlformats.org/officeDocument/2006/relationships" xmlns:p="http://schemas.openxmlformats.org/presentationml/2006/main">
+  <p:cSld>
+    <p:spTree>
+      <p:nvGrpSpPr>
+        <p:cNvPr id="1" name=""/>
+        <p:cNvGrpSpPr/>
+        <p:nvPr/>
+      </p:nvGrpSpPr>
+      <p:grpSpPr>
+        <a:xfrm>
+          <a:off x="0" y="0"/>
+          <a:ext cx="0" cy="0"/>
+          <a:chOff x="0" y="0"/>
+          <a:chExt cx="0" cy="0"/>
+        </a:xfrm>
+      </p:grpSpPr>
+      <p:sp>
+        <p:nvSpPr>
+          <p:cNvPr id="2" name="Title 1"/>
+          <p:cNvSpPr>
+            <a:spLocks noGrp="1"/>
+          </p:cNvSpPr>
+          <p:nvPr>
+            <p:ph type="title"/>
+          </p:nvPr>
+        </p:nvSpPr>
+        <p:spPr/>
+        <p:txBody>
+          <a:bodyPr/>
+          <a:lstStyle/>
+          <a:p>
+            <a:r>
+              <a:rPr lang="en-US" dirty="0"/>
+              <a:t>Question 223.4.0.2</a:t>
+            </a:r>
+          </a:p>
+        </p:txBody>
+      </p:sp>
+      <p:sp>
+        <p:nvSpPr>
+          <p:cNvPr id="3" name="Content Placeholder 2"/>
+          <p:cNvSpPr>
+            <a:spLocks noGrp="1"/>
+          </p:cNvSpPr>
+          <p:nvPr>
+            <p:ph idx="1"/>
+          </p:nvPr>
+        </p:nvSpPr>
+        <p:spPr/>
+        <p:txBody>
+          <a:bodyPr/>
+          <a:lstStyle/>
+          <a:p>
+            <a:pPr marL="0" indent="0">
+              <a:buNone/>
+            </a:pPr>
+            <a:r>
+              <a:rPr lang="en-US" dirty="0"/>
+              <a:t>For sound waves, a compression is a high pressure region, what do we call a low pressure region?</a:t>
+            </a:r>
+          </a:p>
+          <a:p>
+            <a:pPr marL="514350" indent="-514350">
+              <a:buAutoNum type="alphaLcParenR"/>
+            </a:pPr>
+            <a:r>
+              <a:rPr lang="en-US" dirty="0"/>
+              <a:t>Low pressure region</a:t>
+            </a:r>
+          </a:p>
+          <a:p>
+            <a:pPr marL="514350" indent="-514350">
+              <a:buAutoNum type="alphaLcParenR"/>
+            </a:pPr>
+            <a:r>
+              <a:rPr lang="en-US" dirty="0"/>
+              <a:t>Pressure </a:t>
+            </a:r>
+            <a:r>
+              <a:rPr lang="en-US" dirty="0" err="1"/>
+              <a:t>minimimization</a:t>
+            </a:r>
+            <a:endParaRPr lang="en-US" dirty="0"/>
+          </a:p>
+          <a:p>
+            <a:pPr marL="514350" indent="-514350">
+              <a:buAutoNum type="alphaLcParenR"/>
+            </a:pPr>
+            <a:r>
+              <a:rPr lang="en-US" dirty="0" err="1"/>
+              <a:t>hypopresurization</a:t>
+            </a:r>
+            <a:endParaRPr lang="en-US" dirty="0"/>
+          </a:p>
+          <a:p>
+            <a:pPr marL="514350" indent="-514350">
+              <a:buAutoNum type="alphaLcParenR"/>
+            </a:pPr>
+            <a:r>
+              <a:rPr lang="en-US" dirty="0"/>
+              <a:t>Rarefaction</a:t>
+            </a:r>
+          </a:p>
+        </p:txBody>
+      </p:sp>
+      <p:sp>
+        <p:nvSpPr>
+          <p:cNvPr id="4" name="Slide Number Placeholder 3"/>
+          <p:cNvSpPr>
+            <a:spLocks noGrp="1"/>
+          </p:cNvSpPr>
+          <p:nvPr>
+            <p:ph type="sldNum" sz="quarter" idx="12"/>
+          </p:nvPr>
+        </p:nvSpPr>
+        <p:spPr/>
+        <p:txBody>
+          <a:bodyPr/>
+          <a:lstStyle/>
+          <a:p>
+            <a:pPr>
+              <a:defRPr/>
+            </a:pPr>
+            <a:fld id="{64137B81-8888-4253-92EC-0AED2A590749}" type="slidenum">
+              <a:rPr lang="en-US" smtClean="0"/>
+              <a:pPr>
+                <a:defRPr/>
+              </a:pPr>
+              <a:t>30</a:t>
+            </a:fld>
+            <a:endParaRPr lang="en-US"/>
+          </a:p>
+        </p:txBody>
+      </p:sp>
+    </p:spTree>
+    <p:extLst>
+      <p:ext uri="{BB962C8B-B14F-4D97-AF65-F5344CB8AC3E}">
+        <p14:creationId xmlns:p14="http://schemas.microsoft.com/office/powerpoint/2010/main" val="43803941"/>
+      </p:ext>
+    </p:extLst>
+  </p:cSld>
+  <p:clrMapOvr>
+    <a:masterClrMapping/>
+  </p:clrMapOvr>
+</p:sld>
+</file>
+
+<file path=ppt/slides/slide31.xml><?xml version="1.0" encoding="utf-8"?>
 <p:sld xmlns:a="http://schemas.openxmlformats.org/drawingml/2006/main" xmlns:r="http://schemas.openxmlformats.org/officeDocument/2006/relationships" xmlns:p="http://schemas.openxmlformats.org/presentationml/2006/main">
   <p:cSld>
     <p:spTree>
@@ -9145,7 +9268,7 @@
               <a:pPr>
                 <a:defRPr/>
               </a:pPr>
-              <a:t>30</a:t>
+              <a:t>31</a:t>
             </a:fld>
             <a:endParaRPr lang="en-US"/>
           </a:p>
@@ -9164,7 +9287,7 @@
 </p:sld>
 </file>
 
-<file path=ppt/slides/slide31.xml><?xml version="1.0" encoding="utf-8"?>
+<file path=ppt/slides/slide32.xml><?xml version="1.0" encoding="utf-8"?>
 <p:sld xmlns:a="http://schemas.openxmlformats.org/drawingml/2006/main" xmlns:r="http://schemas.openxmlformats.org/officeDocument/2006/relationships" xmlns:p="http://schemas.openxmlformats.org/presentationml/2006/main">
   <p:cSld>
     <p:spTree>
@@ -9226,7 +9349,7 @@
 </p:sld>
 </file>
 
-<file path=ppt/slides/slide32.xml><?xml version="1.0" encoding="utf-8"?>
+<file path=ppt/slides/slide33.xml><?xml version="1.0" encoding="utf-8"?>
 <p:sld xmlns:a="http://schemas.openxmlformats.org/drawingml/2006/main" xmlns:r="http://schemas.openxmlformats.org/officeDocument/2006/relationships" xmlns:p="http://schemas.openxmlformats.org/presentationml/2006/main">
   <p:cSld>
     <p:spTree>
@@ -13823,7 +13946,7 @@
 </p:sld>
 </file>
 
-<file path=ppt/slides/slide33.xml><?xml version="1.0" encoding="utf-8"?>
+<file path=ppt/slides/slide34.xml><?xml version="1.0" encoding="utf-8"?>
 <p:sld xmlns:a="http://schemas.openxmlformats.org/drawingml/2006/main" xmlns:r="http://schemas.openxmlformats.org/officeDocument/2006/relationships" xmlns:p="http://schemas.openxmlformats.org/presentationml/2006/main">
   <p:cSld>
     <p:spTree>
@@ -14639,7 +14762,7 @@
 </p:sld>
 </file>
 
-<file path=ppt/slides/slide34.xml><?xml version="1.0" encoding="utf-8"?>
+<file path=ppt/slides/slide35.xml><?xml version="1.0" encoding="utf-8"?>
 <p:sld xmlns:a="http://schemas.openxmlformats.org/drawingml/2006/main" xmlns:r="http://schemas.openxmlformats.org/officeDocument/2006/relationships" xmlns:p="http://schemas.openxmlformats.org/presentationml/2006/main">
   <p:cSld>
     <p:spTree>
@@ -24105,7 +24228,7 @@
 </p:sld>
 </file>
 
-<file path=ppt/slides/slide35.xml><?xml version="1.0" encoding="utf-8"?>
+<file path=ppt/slides/slide36.xml><?xml version="1.0" encoding="utf-8"?>
 <p:sld xmlns:a="http://schemas.openxmlformats.org/drawingml/2006/main" xmlns:r="http://schemas.openxmlformats.org/officeDocument/2006/relationships" xmlns:p="http://schemas.openxmlformats.org/presentationml/2006/main">
   <p:cSld>
     <p:spTree>
@@ -33744,7 +33867,7 @@
 </p:sld>
 </file>
 
-<file path=ppt/slides/slide36.xml><?xml version="1.0" encoding="utf-8"?>
+<file path=ppt/slides/slide37.xml><?xml version="1.0" encoding="utf-8"?>
 <p:sld xmlns:a="http://schemas.openxmlformats.org/drawingml/2006/main" xmlns:r="http://schemas.openxmlformats.org/officeDocument/2006/relationships" xmlns:p="http://schemas.openxmlformats.org/presentationml/2006/main">
   <p:cSld>
     <p:spTree>
@@ -34435,7 +34558,7 @@
 </p:sld>
 </file>
 
-<file path=ppt/slides/slide37.xml><?xml version="1.0" encoding="utf-8"?>
+<file path=ppt/slides/slide38.xml><?xml version="1.0" encoding="utf-8"?>
 <p:sld xmlns:a="http://schemas.openxmlformats.org/drawingml/2006/main" xmlns:r="http://schemas.openxmlformats.org/officeDocument/2006/relationships" xmlns:p="http://schemas.openxmlformats.org/presentationml/2006/main">
   <p:cSld>
     <p:spTree>
@@ -34555,7 +34678,7 @@
             <a:fld id="{1D24A40A-39FE-434B-BF0F-F604B45A6121}" type="slidenum">
               <a:rPr lang="en-US" smtClean="0"/>
               <a:pPr/>
-              <a:t>37</a:t>
+              <a:t>38</a:t>
             </a:fld>
             <a:endParaRPr lang="en-US"/>
           </a:p>
@@ -34574,7 +34697,7 @@
 </p:sld>
 </file>
 
-<file path=ppt/slides/slide38.xml><?xml version="1.0" encoding="utf-8"?>
+<file path=ppt/slides/slide39.xml><?xml version="1.0" encoding="utf-8"?>
 <p:sld xmlns:a="http://schemas.openxmlformats.org/drawingml/2006/main" xmlns:r="http://schemas.openxmlformats.org/officeDocument/2006/relationships" xmlns:p="http://schemas.openxmlformats.org/presentationml/2006/main">
   <p:cSld>
     <p:spTree>
@@ -34693,7 +34816,7 @@
             <a:fld id="{BE300C31-1AEF-40A0-A6E9-08C5FA527675}" type="slidenum">
               <a:rPr lang="en-US" smtClean="0"/>
               <a:pPr/>
-              <a:t>38</a:t>
+              <a:t>39</a:t>
             </a:fld>
             <a:endParaRPr lang="en-US"/>
           </a:p>
@@ -34712,7 +34835,245 @@
 </p:sld>
 </file>
 
-<file path=ppt/slides/slide39.xml><?xml version="1.0" encoding="utf-8"?>
+<file path=ppt/slides/slide4.xml><?xml version="1.0" encoding="utf-8"?>
+<p:sld xmlns:a="http://schemas.openxmlformats.org/drawingml/2006/main" xmlns:r="http://schemas.openxmlformats.org/officeDocument/2006/relationships" xmlns:p="http://schemas.openxmlformats.org/presentationml/2006/main">
+  <p:cSld>
+    <p:spTree>
+      <p:nvGrpSpPr>
+        <p:cNvPr id="1" name=""/>
+        <p:cNvGrpSpPr/>
+        <p:nvPr/>
+      </p:nvGrpSpPr>
+      <p:grpSpPr>
+        <a:xfrm>
+          <a:off x="0" y="0"/>
+          <a:ext cx="0" cy="0"/>
+          <a:chOff x="0" y="0"/>
+          <a:chExt cx="0" cy="0"/>
+        </a:xfrm>
+      </p:grpSpPr>
+      <p:sp>
+        <p:nvSpPr>
+          <p:cNvPr id="50178" name="Date Placeholder 4"/>
+          <p:cNvSpPr>
+            <a:spLocks noGrp="1"/>
+          </p:cNvSpPr>
+          <p:nvPr>
+            <p:ph type="dt" sz="quarter" idx="10"/>
+          </p:nvPr>
+        </p:nvSpPr>
+        <p:spPr>
+          <a:noFill/>
+        </p:spPr>
+        <p:txBody>
+          <a:bodyPr/>
+          <a:lstStyle/>
+          <a:p>
+            <a:r>
+              <a:rPr lang="en-US"/>
+              <a:t>Winter 2007</a:t>
+            </a:r>
+          </a:p>
+        </p:txBody>
+      </p:sp>
+      <p:sp>
+        <p:nvSpPr>
+          <p:cNvPr id="50179" name="Footer Placeholder 5"/>
+          <p:cNvSpPr>
+            <a:spLocks noGrp="1"/>
+          </p:cNvSpPr>
+          <p:nvPr>
+            <p:ph type="ftr" sz="quarter" idx="11"/>
+          </p:nvPr>
+        </p:nvSpPr>
+        <p:spPr>
+          <a:noFill/>
+        </p:spPr>
+        <p:txBody>
+          <a:bodyPr/>
+          <a:lstStyle/>
+          <a:p>
+            <a:r>
+              <a:rPr lang="en-US"/>
+              <a:t>R. Todd Lines</a:t>
+            </a:r>
+          </a:p>
+        </p:txBody>
+      </p:sp>
+      <p:sp>
+        <p:nvSpPr>
+          <p:cNvPr id="50180" name="Slide Number Placeholder 6"/>
+          <p:cNvSpPr>
+            <a:spLocks noGrp="1"/>
+          </p:cNvSpPr>
+          <p:nvPr>
+            <p:ph type="sldNum" sz="quarter" idx="12"/>
+          </p:nvPr>
+        </p:nvSpPr>
+        <p:spPr>
+          <a:noFill/>
+        </p:spPr>
+        <p:txBody>
+          <a:bodyPr/>
+          <a:lstStyle/>
+          <a:p>
+            <a:fld id="{BDCED46C-3496-4F4D-B6B4-CABD5763A9F2}" type="slidenum">
+              <a:rPr lang="en-US" smtClean="0"/>
+              <a:pPr/>
+              <a:t>4</a:t>
+            </a:fld>
+            <a:endParaRPr lang="en-US"/>
+          </a:p>
+        </p:txBody>
+      </p:sp>
+      <p:sp>
+        <p:nvSpPr>
+          <p:cNvPr id="50181" name="Rectangle 2"/>
+          <p:cNvSpPr>
+            <a:spLocks noGrp="1" noChangeArrowheads="1"/>
+          </p:cNvSpPr>
+          <p:nvPr>
+            <p:ph type="title"/>
+          </p:nvPr>
+        </p:nvSpPr>
+        <p:spPr/>
+        <p:txBody>
+          <a:bodyPr/>
+          <a:lstStyle/>
+          <a:p>
+            <a:pPr eaLnBrk="1" hangingPunct="1"/>
+            <a:r>
+              <a:rPr lang="en-US"/>
+              <a:t>Amplitude and Wavelength</a:t>
+            </a:r>
+          </a:p>
+        </p:txBody>
+      </p:sp>
+      <p:sp>
+        <p:nvSpPr>
+          <p:cNvPr id="50182" name="Rectangle 3"/>
+          <p:cNvSpPr>
+            <a:spLocks noGrp="1" noChangeArrowheads="1"/>
+          </p:cNvSpPr>
+          <p:nvPr>
+            <p:ph type="body" sz="half" idx="1"/>
+          </p:nvPr>
+        </p:nvSpPr>
+        <p:spPr>
+          <a:xfrm>
+            <a:off x="457200" y="1600200"/>
+            <a:ext cx="4879975" cy="4525963"/>
+          </a:xfrm>
+        </p:spPr>
+        <p:txBody>
+          <a:bodyPr/>
+          <a:lstStyle/>
+          <a:p>
+            <a:pPr eaLnBrk="1" hangingPunct="1"/>
+            <a:r>
+              <a:rPr lang="en-US" sz="2400"/>
+              <a:t>The </a:t>
+            </a:r>
+            <a:r>
+              <a:rPr lang="en-US" sz="2400" b="1"/>
+              <a:t>crest</a:t>
+            </a:r>
+            <a:r>
+              <a:rPr lang="en-US" sz="2400"/>
+              <a:t> of the wave is the location of the maximum displacement of the element from its normal position</a:t>
+            </a:r>
+          </a:p>
+          <a:p>
+            <a:pPr lvl="1" eaLnBrk="1" hangingPunct="1"/>
+            <a:r>
+              <a:rPr lang="en-US" sz="2000"/>
+              <a:t>This distance is called the </a:t>
+            </a:r>
+            <a:r>
+              <a:rPr lang="en-US" sz="2000" b="1"/>
+              <a:t>amplitude</a:t>
+            </a:r>
+            <a:r>
+              <a:rPr lang="en-US" sz="2000"/>
+              <a:t>, </a:t>
+            </a:r>
+            <a:r>
+              <a:rPr lang="en-US" sz="2000" i="1"/>
+              <a:t>A</a:t>
+            </a:r>
+          </a:p>
+          <a:p>
+            <a:pPr lvl="1" eaLnBrk="1" hangingPunct="1"/>
+            <a:r>
+              <a:rPr lang="en-US" sz="2000"/>
+              <a:t>The point at the negative amplitude is called the </a:t>
+            </a:r>
+            <a:r>
+              <a:rPr lang="en-US" sz="2000" b="1"/>
+              <a:t>trough</a:t>
+            </a:r>
+            <a:endParaRPr lang="en-US" sz="2000"/>
+          </a:p>
+          <a:p>
+            <a:pPr eaLnBrk="1" hangingPunct="1"/>
+            <a:r>
+              <a:rPr lang="en-US" sz="2400"/>
+              <a:t>The </a:t>
+            </a:r>
+            <a:r>
+              <a:rPr lang="en-US" sz="2400" b="1"/>
+              <a:t>wavelength</a:t>
+            </a:r>
+            <a:r>
+              <a:rPr lang="en-US" sz="2400"/>
+              <a:t>, </a:t>
+            </a:r>
+            <a:r>
+              <a:rPr lang="en-US" sz="2400" i="1">
+                <a:latin typeface="Symbol" pitchFamily="18" charset="2"/>
+              </a:rPr>
+              <a:t>l</a:t>
+            </a:r>
+            <a:r>
+              <a:rPr lang="en-US" sz="2400"/>
+              <a:t>, is the distance from one crest to the next</a:t>
+            </a:r>
+          </a:p>
+        </p:txBody>
+      </p:sp>
+      <p:sp>
+        <p:nvSpPr>
+          <p:cNvPr id="9" name="ClipArt Placeholder 8"/>
+          <p:cNvSpPr>
+            <a:spLocks noGrp="1"/>
+          </p:cNvSpPr>
+          <p:nvPr>
+            <p:ph type="clipArt" sz="half" idx="2"/>
+          </p:nvPr>
+        </p:nvSpPr>
+        <p:spPr/>
+        <p:txBody>
+          <a:bodyPr/>
+          <a:lstStyle/>
+          <a:p>
+            <a:endParaRPr lang="en-US"/>
+          </a:p>
+        </p:txBody>
+      </p:sp>
+    </p:spTree>
+    <p:extLst>
+      <p:ext uri="{BB962C8B-B14F-4D97-AF65-F5344CB8AC3E}">
+        <p14:creationId xmlns:p14="http://schemas.microsoft.com/office/powerpoint/2010/main" val="2614111477"/>
+      </p:ext>
+    </p:extLst>
+  </p:cSld>
+  <p:clrMapOvr>
+    <a:masterClrMapping/>
+  </p:clrMapOvr>
+</p:sld>
+</file>
+
+<file path=ppt/slides/slide40.xml><?xml version="1.0" encoding="utf-8"?>
 <p:sld xmlns:a="http://schemas.openxmlformats.org/drawingml/2006/main" xmlns:r="http://schemas.openxmlformats.org/officeDocument/2006/relationships" xmlns:p="http://schemas.openxmlformats.org/presentationml/2006/main">
   <p:cSld>
     <p:spTree>
@@ -34797,7 +35158,7 @@
             <a:fld id="{B51AC80D-74C9-41DC-A482-5937D870D373}" type="slidenum">
               <a:rPr lang="en-US" smtClean="0"/>
               <a:pPr/>
-              <a:t>39</a:t>
+              <a:t>40</a:t>
             </a:fld>
             <a:endParaRPr lang="en-US"/>
           </a:p>
@@ -34958,245 +35319,7 @@
 </p:sld>
 </file>
 
-<file path=ppt/slides/slide4.xml><?xml version="1.0" encoding="utf-8"?>
-<p:sld xmlns:a="http://schemas.openxmlformats.org/drawingml/2006/main" xmlns:r="http://schemas.openxmlformats.org/officeDocument/2006/relationships" xmlns:p="http://schemas.openxmlformats.org/presentationml/2006/main">
-  <p:cSld>
-    <p:spTree>
-      <p:nvGrpSpPr>
-        <p:cNvPr id="1" name=""/>
-        <p:cNvGrpSpPr/>
-        <p:nvPr/>
-      </p:nvGrpSpPr>
-      <p:grpSpPr>
-        <a:xfrm>
-          <a:off x="0" y="0"/>
-          <a:ext cx="0" cy="0"/>
-          <a:chOff x="0" y="0"/>
-          <a:chExt cx="0" cy="0"/>
-        </a:xfrm>
-      </p:grpSpPr>
-      <p:sp>
-        <p:nvSpPr>
-          <p:cNvPr id="50178" name="Date Placeholder 4"/>
-          <p:cNvSpPr>
-            <a:spLocks noGrp="1"/>
-          </p:cNvSpPr>
-          <p:nvPr>
-            <p:ph type="dt" sz="quarter" idx="10"/>
-          </p:nvPr>
-        </p:nvSpPr>
-        <p:spPr>
-          <a:noFill/>
-        </p:spPr>
-        <p:txBody>
-          <a:bodyPr/>
-          <a:lstStyle/>
-          <a:p>
-            <a:r>
-              <a:rPr lang="en-US"/>
-              <a:t>Winter 2007</a:t>
-            </a:r>
-          </a:p>
-        </p:txBody>
-      </p:sp>
-      <p:sp>
-        <p:nvSpPr>
-          <p:cNvPr id="50179" name="Footer Placeholder 5"/>
-          <p:cNvSpPr>
-            <a:spLocks noGrp="1"/>
-          </p:cNvSpPr>
-          <p:nvPr>
-            <p:ph type="ftr" sz="quarter" idx="11"/>
-          </p:nvPr>
-        </p:nvSpPr>
-        <p:spPr>
-          <a:noFill/>
-        </p:spPr>
-        <p:txBody>
-          <a:bodyPr/>
-          <a:lstStyle/>
-          <a:p>
-            <a:r>
-              <a:rPr lang="en-US"/>
-              <a:t>R. Todd Lines</a:t>
-            </a:r>
-          </a:p>
-        </p:txBody>
-      </p:sp>
-      <p:sp>
-        <p:nvSpPr>
-          <p:cNvPr id="50180" name="Slide Number Placeholder 6"/>
-          <p:cNvSpPr>
-            <a:spLocks noGrp="1"/>
-          </p:cNvSpPr>
-          <p:nvPr>
-            <p:ph type="sldNum" sz="quarter" idx="12"/>
-          </p:nvPr>
-        </p:nvSpPr>
-        <p:spPr>
-          <a:noFill/>
-        </p:spPr>
-        <p:txBody>
-          <a:bodyPr/>
-          <a:lstStyle/>
-          <a:p>
-            <a:fld id="{BDCED46C-3496-4F4D-B6B4-CABD5763A9F2}" type="slidenum">
-              <a:rPr lang="en-US" smtClean="0"/>
-              <a:pPr/>
-              <a:t>4</a:t>
-            </a:fld>
-            <a:endParaRPr lang="en-US"/>
-          </a:p>
-        </p:txBody>
-      </p:sp>
-      <p:sp>
-        <p:nvSpPr>
-          <p:cNvPr id="50181" name="Rectangle 2"/>
-          <p:cNvSpPr>
-            <a:spLocks noGrp="1" noChangeArrowheads="1"/>
-          </p:cNvSpPr>
-          <p:nvPr>
-            <p:ph type="title"/>
-          </p:nvPr>
-        </p:nvSpPr>
-        <p:spPr/>
-        <p:txBody>
-          <a:bodyPr/>
-          <a:lstStyle/>
-          <a:p>
-            <a:pPr eaLnBrk="1" hangingPunct="1"/>
-            <a:r>
-              <a:rPr lang="en-US"/>
-              <a:t>Amplitude and Wavelength</a:t>
-            </a:r>
-          </a:p>
-        </p:txBody>
-      </p:sp>
-      <p:sp>
-        <p:nvSpPr>
-          <p:cNvPr id="50182" name="Rectangle 3"/>
-          <p:cNvSpPr>
-            <a:spLocks noGrp="1" noChangeArrowheads="1"/>
-          </p:cNvSpPr>
-          <p:nvPr>
-            <p:ph type="body" sz="half" idx="1"/>
-          </p:nvPr>
-        </p:nvSpPr>
-        <p:spPr>
-          <a:xfrm>
-            <a:off x="457200" y="1600200"/>
-            <a:ext cx="4879975" cy="4525963"/>
-          </a:xfrm>
-        </p:spPr>
-        <p:txBody>
-          <a:bodyPr/>
-          <a:lstStyle/>
-          <a:p>
-            <a:pPr eaLnBrk="1" hangingPunct="1"/>
-            <a:r>
-              <a:rPr lang="en-US" sz="2400"/>
-              <a:t>The </a:t>
-            </a:r>
-            <a:r>
-              <a:rPr lang="en-US" sz="2400" b="1"/>
-              <a:t>crest</a:t>
-            </a:r>
-            <a:r>
-              <a:rPr lang="en-US" sz="2400"/>
-              <a:t> of the wave is the location of the maximum displacement of the element from its normal position</a:t>
-            </a:r>
-          </a:p>
-          <a:p>
-            <a:pPr lvl="1" eaLnBrk="1" hangingPunct="1"/>
-            <a:r>
-              <a:rPr lang="en-US" sz="2000"/>
-              <a:t>This distance is called the </a:t>
-            </a:r>
-            <a:r>
-              <a:rPr lang="en-US" sz="2000" b="1"/>
-              <a:t>amplitude</a:t>
-            </a:r>
-            <a:r>
-              <a:rPr lang="en-US" sz="2000"/>
-              <a:t>, </a:t>
-            </a:r>
-            <a:r>
-              <a:rPr lang="en-US" sz="2000" i="1"/>
-              <a:t>A</a:t>
-            </a:r>
-          </a:p>
-          <a:p>
-            <a:pPr lvl="1" eaLnBrk="1" hangingPunct="1"/>
-            <a:r>
-              <a:rPr lang="en-US" sz="2000"/>
-              <a:t>The point at the negative amplitude is called the </a:t>
-            </a:r>
-            <a:r>
-              <a:rPr lang="en-US" sz="2000" b="1"/>
-              <a:t>trough</a:t>
-            </a:r>
-            <a:endParaRPr lang="en-US" sz="2000"/>
-          </a:p>
-          <a:p>
-            <a:pPr eaLnBrk="1" hangingPunct="1"/>
-            <a:r>
-              <a:rPr lang="en-US" sz="2400"/>
-              <a:t>The </a:t>
-            </a:r>
-            <a:r>
-              <a:rPr lang="en-US" sz="2400" b="1"/>
-              <a:t>wavelength</a:t>
-            </a:r>
-            <a:r>
-              <a:rPr lang="en-US" sz="2400"/>
-              <a:t>, </a:t>
-            </a:r>
-            <a:r>
-              <a:rPr lang="en-US" sz="2400" i="1">
-                <a:latin typeface="Symbol" pitchFamily="18" charset="2"/>
-              </a:rPr>
-              <a:t>l</a:t>
-            </a:r>
-            <a:r>
-              <a:rPr lang="en-US" sz="2400"/>
-              <a:t>, is the distance from one crest to the next</a:t>
-            </a:r>
-          </a:p>
-        </p:txBody>
-      </p:sp>
-      <p:sp>
-        <p:nvSpPr>
-          <p:cNvPr id="9" name="ClipArt Placeholder 8"/>
-          <p:cNvSpPr>
-            <a:spLocks noGrp="1"/>
-          </p:cNvSpPr>
-          <p:nvPr>
-            <p:ph type="clipArt" sz="half" idx="2"/>
-          </p:nvPr>
-        </p:nvSpPr>
-        <p:spPr/>
-        <p:txBody>
-          <a:bodyPr/>
-          <a:lstStyle/>
-          <a:p>
-            <a:endParaRPr lang="en-US"/>
-          </a:p>
-        </p:txBody>
-      </p:sp>
-    </p:spTree>
-    <p:extLst>
-      <p:ext uri="{BB962C8B-B14F-4D97-AF65-F5344CB8AC3E}">
-        <p14:creationId xmlns:p14="http://schemas.microsoft.com/office/powerpoint/2010/main" val="2614111477"/>
-      </p:ext>
-    </p:extLst>
-  </p:cSld>
-  <p:clrMapOvr>
-    <a:masterClrMapping/>
-  </p:clrMapOvr>
-</p:sld>
-</file>
-
-<file path=ppt/slides/slide40.xml><?xml version="1.0" encoding="utf-8"?>
+<file path=ppt/slides/slide41.xml><?xml version="1.0" encoding="utf-8"?>
 <p:sld xmlns:a="http://schemas.openxmlformats.org/drawingml/2006/main" xmlns:r="http://schemas.openxmlformats.org/officeDocument/2006/relationships" xmlns:p="http://schemas.openxmlformats.org/presentationml/2006/main">
   <p:cSld>
     <p:spTree>
@@ -35321,7 +35444,7 @@
             <a:fld id="{44B496DA-9A26-4127-B4DB-65938A21EBFF}" type="slidenum">
               <a:rPr lang="en-US" smtClean="0"/>
               <a:pPr/>
-              <a:t>40</a:t>
+              <a:t>41</a:t>
             </a:fld>
             <a:endParaRPr lang="en-US"/>
           </a:p>
@@ -36503,7 +36626,7 @@
 </p:sld>
 </file>
 
-<file path=ppt/slides/slide41.xml><?xml version="1.0" encoding="utf-8"?>
+<file path=ppt/slides/slide42.xml><?xml version="1.0" encoding="utf-8"?>
 <p:sld xmlns:a="http://schemas.openxmlformats.org/drawingml/2006/main" xmlns:r="http://schemas.openxmlformats.org/officeDocument/2006/relationships" xmlns:p="http://schemas.openxmlformats.org/presentationml/2006/main">
   <p:cSld>
     <p:spTree>
@@ -36588,7 +36711,7 @@
             <a:fld id="{5C7A3FB9-8224-4B6F-9F67-0AF968C11E12}" type="slidenum">
               <a:rPr lang="en-US" smtClean="0"/>
               <a:pPr/>
-              <a:t>41</a:t>
+              <a:t>42</a:t>
             </a:fld>
             <a:endParaRPr lang="en-US"/>
           </a:p>
@@ -37877,7 +38000,7 @@
 </p:sld>
 </file>
 
-<file path=ppt/slides/slide42.xml><?xml version="1.0" encoding="utf-8"?>
+<file path=ppt/slides/slide43.xml><?xml version="1.0" encoding="utf-8"?>
 <p:sld xmlns:a="http://schemas.openxmlformats.org/drawingml/2006/main" xmlns:r="http://schemas.openxmlformats.org/officeDocument/2006/relationships" xmlns:p="http://schemas.openxmlformats.org/presentationml/2006/main">
   <p:cSld>
     <p:spTree>
@@ -37962,7 +38085,7 @@
             <a:fld id="{BB937D73-E016-4D34-A007-D3CAB01028EC}" type="slidenum">
               <a:rPr lang="en-US" smtClean="0"/>
               <a:pPr/>
-              <a:t>42</a:t>
+              <a:t>43</a:t>
             </a:fld>
             <a:endParaRPr lang="en-US"/>
           </a:p>
@@ -39312,7 +39435,7 @@
 </p:sld>
 </file>
 
-<file path=ppt/slides/slide43.xml><?xml version="1.0" encoding="utf-8"?>
+<file path=ppt/slides/slide44.xml><?xml version="1.0" encoding="utf-8"?>
 <p:sld xmlns:a="http://schemas.openxmlformats.org/drawingml/2006/main" xmlns:r="http://schemas.openxmlformats.org/officeDocument/2006/relationships" xmlns:p="http://schemas.openxmlformats.org/presentationml/2006/main">
   <p:cSld>
     <p:spTree>
@@ -39397,7 +39520,7 @@
             <a:fld id="{C00B0964-3FFB-4881-9119-45BABDCA57FB}" type="slidenum">
               <a:rPr lang="en-US" smtClean="0"/>
               <a:pPr/>
-              <a:t>43</a:t>
+              <a:t>44</a:t>
             </a:fld>
             <a:endParaRPr lang="en-US"/>
           </a:p>
@@ -42200,7 +42323,7 @@
 </p:sld>
 </file>
 
-<file path=ppt/slides/slide44.xml><?xml version="1.0" encoding="utf-8"?>
+<file path=ppt/slides/slide45.xml><?xml version="1.0" encoding="utf-8"?>
 <p:sld xmlns:a="http://schemas.openxmlformats.org/drawingml/2006/main" xmlns:r="http://schemas.openxmlformats.org/officeDocument/2006/relationships" xmlns:p="http://schemas.openxmlformats.org/presentationml/2006/main">
   <p:cSld>
     <p:spTree>
@@ -42285,7 +42408,7 @@
             <a:fld id="{3310E9A9-CDC9-4C8C-AA01-E7907DAB06D4}" type="slidenum">
               <a:rPr lang="en-US" smtClean="0"/>
               <a:pPr/>
-              <a:t>44</a:t>
+              <a:t>45</a:t>
             </a:fld>
             <a:endParaRPr lang="en-US"/>
           </a:p>
@@ -43912,7 +44035,7 @@
 </p:sld>
 </file>
 
-<file path=ppt/slides/slide45.xml><?xml version="1.0" encoding="utf-8"?>
+<file path=ppt/slides/slide46.xml><?xml version="1.0" encoding="utf-8"?>
 <p:sld xmlns:a="http://schemas.openxmlformats.org/drawingml/2006/main" xmlns:r="http://schemas.openxmlformats.org/officeDocument/2006/relationships" xmlns:p="http://schemas.openxmlformats.org/presentationml/2006/main">
   <p:cSld>
     <p:spTree>
@@ -43997,7 +44120,7 @@
             <a:fld id="{EBEC6F0E-A2C5-4AC2-BD25-525A6BEF0D8E}" type="slidenum">
               <a:rPr lang="en-US" smtClean="0"/>
               <a:pPr/>
-              <a:t>45</a:t>
+              <a:t>46</a:t>
             </a:fld>
             <a:endParaRPr lang="en-US"/>
           </a:p>
@@ -45818,7 +45941,7 @@
 </p:sld>
 </file>
 
-<file path=ppt/slides/slide46.xml><?xml version="1.0" encoding="utf-8"?>
+<file path=ppt/slides/slide47.xml><?xml version="1.0" encoding="utf-8"?>
 <p:sld xmlns:a="http://schemas.openxmlformats.org/drawingml/2006/main" xmlns:r="http://schemas.openxmlformats.org/officeDocument/2006/relationships" xmlns:p="http://schemas.openxmlformats.org/presentationml/2006/main">
   <p:cSld>
     <p:spTree>
@@ -46084,7 +46207,7 @@
             <a:fld id="{7E643066-6A67-4F35-A09C-605218B5A8FD}" type="slidenum">
               <a:rPr lang="en-US" smtClean="0"/>
               <a:pPr/>
-              <a:t>46</a:t>
+              <a:t>47</a:t>
             </a:fld>
             <a:endParaRPr lang="en-US"/>
           </a:p>
@@ -46103,7 +46226,7 @@
 </p:sld>
 </file>
 
-<file path=ppt/slides/slide47.xml><?xml version="1.0" encoding="utf-8"?>
+<file path=ppt/slides/slide48.xml><?xml version="1.0" encoding="utf-8"?>
 <p:sld xmlns:a="http://schemas.openxmlformats.org/drawingml/2006/main" xmlns:r="http://schemas.openxmlformats.org/officeDocument/2006/relationships" xmlns:p="http://schemas.openxmlformats.org/presentationml/2006/main">
   <p:cSld>
     <p:spTree>
@@ -46228,7 +46351,7 @@
             <a:fld id="{6A354CA6-2371-4C3D-9BCD-3813C9281DFB}" type="slidenum">
               <a:rPr lang="en-US" smtClean="0"/>
               <a:pPr/>
-              <a:t>47</a:t>
+              <a:t>48</a:t>
             </a:fld>
             <a:endParaRPr lang="en-US"/>
           </a:p>
@@ -46238,107 +46361,6 @@
     <p:extLst>
       <p:ext uri="{BB962C8B-B14F-4D97-AF65-F5344CB8AC3E}">
         <p14:creationId xmlns:p14="http://schemas.microsoft.com/office/powerpoint/2010/main" val="2288244738"/>
-      </p:ext>
-    </p:extLst>
-  </p:cSld>
-  <p:clrMapOvr>
-    <a:masterClrMapping/>
-  </p:clrMapOvr>
-</p:sld>
-</file>
-
-<file path=ppt/slides/slide48.xml><?xml version="1.0" encoding="utf-8"?>
-<p:sld xmlns:a="http://schemas.openxmlformats.org/drawingml/2006/main" xmlns:r="http://schemas.openxmlformats.org/officeDocument/2006/relationships" xmlns:p="http://schemas.openxmlformats.org/presentationml/2006/main">
-  <p:cSld>
-    <p:spTree>
-      <p:nvGrpSpPr>
-        <p:cNvPr id="1" name=""/>
-        <p:cNvGrpSpPr/>
-        <p:nvPr/>
-      </p:nvGrpSpPr>
-      <p:grpSpPr>
-        <a:xfrm>
-          <a:off x="0" y="0"/>
-          <a:ext cx="0" cy="0"/>
-          <a:chOff x="0" y="0"/>
-          <a:chExt cx="0" cy="0"/>
-        </a:xfrm>
-      </p:grpSpPr>
-      <p:sp>
-        <p:nvSpPr>
-          <p:cNvPr id="2" name="Title 1"/>
-          <p:cNvSpPr>
-            <a:spLocks noGrp="1"/>
-          </p:cNvSpPr>
-          <p:nvPr>
-            <p:ph type="title"/>
-          </p:nvPr>
-        </p:nvSpPr>
-        <p:spPr/>
-        <p:txBody>
-          <a:bodyPr/>
-          <a:lstStyle/>
-          <a:p>
-            <a:endParaRPr lang="en-US"/>
-          </a:p>
-        </p:txBody>
-      </p:sp>
-      <p:sp>
-        <p:nvSpPr>
-          <p:cNvPr id="3" name="Content Placeholder 2"/>
-          <p:cNvSpPr>
-            <a:spLocks noGrp="1"/>
-          </p:cNvSpPr>
-          <p:nvPr>
-            <p:ph idx="1"/>
-          </p:nvPr>
-        </p:nvSpPr>
-        <p:spPr/>
-        <p:txBody>
-          <a:bodyPr/>
-          <a:lstStyle/>
-          <a:p>
-            <a:endParaRPr lang="en-US"/>
-          </a:p>
-        </p:txBody>
-      </p:sp>
-      <p:pic>
-        <p:nvPicPr>
-          <p:cNvPr id="28674" name="Picture 2"/>
-          <p:cNvPicPr>
-            <a:picLocks noChangeAspect="1" noChangeArrowheads="1"/>
-          </p:cNvPicPr>
-          <p:nvPr/>
-        </p:nvPicPr>
-        <p:blipFill>
-          <a:blip r:embed="rId2" cstate="print"/>
-          <a:srcRect/>
-          <a:stretch>
-            <a:fillRect/>
-          </a:stretch>
-        </p:blipFill>
-        <p:spPr bwMode="auto">
-          <a:xfrm>
-            <a:off x="340093" y="762000"/>
-            <a:ext cx="8803907" cy="4876800"/>
-          </a:xfrm>
-          <a:prstGeom prst="rect">
-            <a:avLst/>
-          </a:prstGeom>
-          <a:noFill/>
-          <a:ln w="9525">
-            <a:noFill/>
-            <a:miter lim="800000"/>
-            <a:headEnd/>
-            <a:tailEnd/>
-          </a:ln>
-          <a:effectLst/>
-        </p:spPr>
-      </p:pic>
-    </p:spTree>
-    <p:extLst>
-      <p:ext uri="{BB962C8B-B14F-4D97-AF65-F5344CB8AC3E}">
-        <p14:creationId xmlns:p14="http://schemas.microsoft.com/office/powerpoint/2010/main" val="1719306622"/>
       </p:ext>
     </p:extLst>
   </p:cSld>
@@ -46380,10 +46402,7 @@
           <a:bodyPr/>
           <a:lstStyle/>
           <a:p>
-            <a:r>
-              <a:rPr lang="en-US" dirty="0"/>
-              <a:t>Question 223.4.4.5</a:t>
-            </a:r>
+            <a:endParaRPr lang="en-US"/>
           </a:p>
         </p:txBody>
       </p:sp>
@@ -46399,117 +46418,50 @@
         </p:nvSpPr>
         <p:spPr/>
         <p:txBody>
-          <a:bodyPr>
-            <a:normAutofit fontScale="85000" lnSpcReduction="10000"/>
-          </a:bodyPr>
+          <a:bodyPr/>
           <a:lstStyle/>
           <a:p>
-            <a:pPr marL="0" indent="0">
-              <a:buNone/>
-            </a:pPr>
-            <a:r>
-              <a:rPr lang="en-US" dirty="0"/>
-              <a:t>Two ropes of different linear mass density are tied together.  A sinusoidal wave goes from rope A rope where the wave speed is 4.0 m/s to rope B where the wave speed is 2.0 m/s. If the initial wave has a wavelength of 3.0 m, what is the wavelength in rope B?</a:t>
-            </a:r>
-          </a:p>
-          <a:p>
-            <a:pPr marL="514350" indent="-514350">
-              <a:buAutoNum type="alphaLcParenR"/>
-            </a:pPr>
-            <a:r>
-              <a:rPr lang="en-US" dirty="0"/>
-              <a:t>2/3 m</a:t>
-            </a:r>
-          </a:p>
-          <a:p>
-            <a:pPr marL="514350" indent="-514350">
-              <a:buAutoNum type="alphaLcParenR"/>
-            </a:pPr>
-            <a:r>
-              <a:rPr lang="en-US" dirty="0"/>
-              <a:t>3/2 m</a:t>
-            </a:r>
-          </a:p>
-          <a:p>
-            <a:pPr marL="514350" indent="-514350">
-              <a:buAutoNum type="alphaLcParenR"/>
-            </a:pPr>
-            <a:r>
-              <a:rPr lang="en-US" dirty="0"/>
-              <a:t>3 m</a:t>
-            </a:r>
-          </a:p>
-          <a:p>
-            <a:pPr marL="514350" indent="-514350">
-              <a:buAutoNum type="alphaLcParenR"/>
-            </a:pPr>
-            <a:r>
-              <a:rPr lang="en-US" dirty="0"/>
-              <a:t>6 m</a:t>
-            </a:r>
-          </a:p>
-          <a:p>
-            <a:pPr marL="514350" indent="-514350">
-              <a:buAutoNum type="alphaLcParenR"/>
-            </a:pPr>
-            <a:r>
-              <a:rPr lang="en-US" dirty="0"/>
-              <a:t>1/6 m</a:t>
-            </a:r>
-          </a:p>
-          <a:p>
-            <a:pPr marL="514350" indent="-514350">
-              <a:buAutoNum type="alphaLcParenR"/>
-            </a:pPr>
-            <a:endParaRPr lang="en-US" dirty="0"/>
-          </a:p>
-          <a:p>
-            <a:pPr marL="514350" indent="-514350">
-              <a:buAutoNum type="alphaLcParenR"/>
-            </a:pPr>
-            <a:endParaRPr lang="en-US" dirty="0"/>
-          </a:p>
-          <a:p>
-            <a:pPr marL="514350" indent="-514350">
-              <a:buAutoNum type="alphaLcParenR"/>
-            </a:pPr>
-            <a:endParaRPr lang="en-US" dirty="0"/>
+            <a:endParaRPr lang="en-US"/>
           </a:p>
         </p:txBody>
       </p:sp>
-      <p:sp>
-        <p:nvSpPr>
-          <p:cNvPr id="4" name="Slide Number Placeholder 3"/>
-          <p:cNvSpPr>
-            <a:spLocks noGrp="1"/>
-          </p:cNvSpPr>
-          <p:nvPr>
-            <p:ph type="sldNum" sz="quarter" idx="12"/>
-          </p:nvPr>
-        </p:nvSpPr>
-        <p:spPr/>
-        <p:txBody>
-          <a:bodyPr/>
-          <a:lstStyle/>
-          <a:p>
-            <a:pPr>
-              <a:defRPr/>
-            </a:pPr>
-            <a:fld id="{64137B81-8888-4253-92EC-0AED2A590749}" type="slidenum">
-              <a:rPr lang="en-US" smtClean="0"/>
-              <a:pPr>
-                <a:defRPr/>
-              </a:pPr>
-              <a:t>49</a:t>
-            </a:fld>
-            <a:endParaRPr lang="en-US"/>
-          </a:p>
-        </p:txBody>
-      </p:sp>
+      <p:pic>
+        <p:nvPicPr>
+          <p:cNvPr id="28674" name="Picture 2"/>
+          <p:cNvPicPr>
+            <a:picLocks noChangeAspect="1" noChangeArrowheads="1"/>
+          </p:cNvPicPr>
+          <p:nvPr/>
+        </p:nvPicPr>
+        <p:blipFill>
+          <a:blip r:embed="rId2" cstate="print"/>
+          <a:srcRect/>
+          <a:stretch>
+            <a:fillRect/>
+          </a:stretch>
+        </p:blipFill>
+        <p:spPr bwMode="auto">
+          <a:xfrm>
+            <a:off x="340093" y="762000"/>
+            <a:ext cx="8803907" cy="4876800"/>
+          </a:xfrm>
+          <a:prstGeom prst="rect">
+            <a:avLst/>
+          </a:prstGeom>
+          <a:noFill/>
+          <a:ln w="9525">
+            <a:noFill/>
+            <a:miter lim="800000"/>
+            <a:headEnd/>
+            <a:tailEnd/>
+          </a:ln>
+          <a:effectLst/>
+        </p:spPr>
+      </p:pic>
     </p:spTree>
     <p:extLst>
       <p:ext uri="{BB962C8B-B14F-4D97-AF65-F5344CB8AC3E}">
-        <p14:creationId xmlns:p14="http://schemas.microsoft.com/office/powerpoint/2010/main" val="3009964422"/>
+        <p14:creationId xmlns:p14="http://schemas.microsoft.com/office/powerpoint/2010/main" val="1719306622"/>
       </p:ext>
     </p:extLst>
   </p:cSld>
@@ -46689,6 +46641,177 @@
       </p:grpSpPr>
       <p:sp>
         <p:nvSpPr>
+          <p:cNvPr id="2" name="Title 1"/>
+          <p:cNvSpPr>
+            <a:spLocks noGrp="1"/>
+          </p:cNvSpPr>
+          <p:nvPr>
+            <p:ph type="title"/>
+          </p:nvPr>
+        </p:nvSpPr>
+        <p:spPr/>
+        <p:txBody>
+          <a:bodyPr/>
+          <a:lstStyle/>
+          <a:p>
+            <a:r>
+              <a:rPr lang="en-US" dirty="0"/>
+              <a:t>Question 223.4.4.5</a:t>
+            </a:r>
+          </a:p>
+        </p:txBody>
+      </p:sp>
+      <p:sp>
+        <p:nvSpPr>
+          <p:cNvPr id="3" name="Content Placeholder 2"/>
+          <p:cNvSpPr>
+            <a:spLocks noGrp="1"/>
+          </p:cNvSpPr>
+          <p:nvPr>
+            <p:ph idx="1"/>
+          </p:nvPr>
+        </p:nvSpPr>
+        <p:spPr/>
+        <p:txBody>
+          <a:bodyPr>
+            <a:normAutofit fontScale="85000" lnSpcReduction="10000"/>
+          </a:bodyPr>
+          <a:lstStyle/>
+          <a:p>
+            <a:pPr marL="0" indent="0">
+              <a:buNone/>
+            </a:pPr>
+            <a:r>
+              <a:rPr lang="en-US" dirty="0"/>
+              <a:t>Two ropes of different linear mass density are tied together.  A sinusoidal wave goes from rope A rope where the wave speed is 4.0 m/s to rope B where the wave speed is 2.0 m/s. If the initial wave has a wavelength of 3.0 m, what is the wavelength in rope B?</a:t>
+            </a:r>
+          </a:p>
+          <a:p>
+            <a:pPr marL="514350" indent="-514350">
+              <a:buAutoNum type="alphaLcParenR"/>
+            </a:pPr>
+            <a:r>
+              <a:rPr lang="en-US" dirty="0"/>
+              <a:t>2/3 m</a:t>
+            </a:r>
+          </a:p>
+          <a:p>
+            <a:pPr marL="514350" indent="-514350">
+              <a:buAutoNum type="alphaLcParenR"/>
+            </a:pPr>
+            <a:r>
+              <a:rPr lang="en-US" dirty="0"/>
+              <a:t>3/2 m</a:t>
+            </a:r>
+          </a:p>
+          <a:p>
+            <a:pPr marL="514350" indent="-514350">
+              <a:buAutoNum type="alphaLcParenR"/>
+            </a:pPr>
+            <a:r>
+              <a:rPr lang="en-US" dirty="0"/>
+              <a:t>3 m</a:t>
+            </a:r>
+          </a:p>
+          <a:p>
+            <a:pPr marL="514350" indent="-514350">
+              <a:buAutoNum type="alphaLcParenR"/>
+            </a:pPr>
+            <a:r>
+              <a:rPr lang="en-US" dirty="0"/>
+              <a:t>6 m</a:t>
+            </a:r>
+          </a:p>
+          <a:p>
+            <a:pPr marL="514350" indent="-514350">
+              <a:buAutoNum type="alphaLcParenR"/>
+            </a:pPr>
+            <a:r>
+              <a:rPr lang="en-US" dirty="0"/>
+              <a:t>1/6 m</a:t>
+            </a:r>
+          </a:p>
+          <a:p>
+            <a:pPr marL="514350" indent="-514350">
+              <a:buAutoNum type="alphaLcParenR"/>
+            </a:pPr>
+            <a:endParaRPr lang="en-US" dirty="0"/>
+          </a:p>
+          <a:p>
+            <a:pPr marL="514350" indent="-514350">
+              <a:buAutoNum type="alphaLcParenR"/>
+            </a:pPr>
+            <a:endParaRPr lang="en-US" dirty="0"/>
+          </a:p>
+          <a:p>
+            <a:pPr marL="514350" indent="-514350">
+              <a:buAutoNum type="alphaLcParenR"/>
+            </a:pPr>
+            <a:endParaRPr lang="en-US" dirty="0"/>
+          </a:p>
+        </p:txBody>
+      </p:sp>
+      <p:sp>
+        <p:nvSpPr>
+          <p:cNvPr id="4" name="Slide Number Placeholder 3"/>
+          <p:cNvSpPr>
+            <a:spLocks noGrp="1"/>
+          </p:cNvSpPr>
+          <p:nvPr>
+            <p:ph type="sldNum" sz="quarter" idx="12"/>
+          </p:nvPr>
+        </p:nvSpPr>
+        <p:spPr/>
+        <p:txBody>
+          <a:bodyPr/>
+          <a:lstStyle/>
+          <a:p>
+            <a:pPr>
+              <a:defRPr/>
+            </a:pPr>
+            <a:fld id="{64137B81-8888-4253-92EC-0AED2A590749}" type="slidenum">
+              <a:rPr lang="en-US" smtClean="0"/>
+              <a:pPr>
+                <a:defRPr/>
+              </a:pPr>
+              <a:t>50</a:t>
+            </a:fld>
+            <a:endParaRPr lang="en-US"/>
+          </a:p>
+        </p:txBody>
+      </p:sp>
+    </p:spTree>
+    <p:extLst>
+      <p:ext uri="{BB962C8B-B14F-4D97-AF65-F5344CB8AC3E}">
+        <p14:creationId xmlns:p14="http://schemas.microsoft.com/office/powerpoint/2010/main" val="3009964422"/>
+      </p:ext>
+    </p:extLst>
+  </p:cSld>
+  <p:clrMapOvr>
+    <a:masterClrMapping/>
+  </p:clrMapOvr>
+</p:sld>
+</file>
+
+<file path=ppt/slides/slide51.xml><?xml version="1.0" encoding="utf-8"?>
+<p:sld xmlns:a="http://schemas.openxmlformats.org/drawingml/2006/main" xmlns:r="http://schemas.openxmlformats.org/officeDocument/2006/relationships" xmlns:p="http://schemas.openxmlformats.org/presentationml/2006/main">
+  <p:cSld>
+    <p:spTree>
+      <p:nvGrpSpPr>
+        <p:cNvPr id="1" name=""/>
+        <p:cNvGrpSpPr/>
+        <p:nvPr/>
+      </p:nvGrpSpPr>
+      <p:grpSpPr>
+        <a:xfrm>
+          <a:off x="0" y="0"/>
+          <a:ext cx="0" cy="0"/>
+          <a:chOff x="0" y="0"/>
+          <a:chExt cx="0" cy="0"/>
+        </a:xfrm>
+      </p:grpSpPr>
+      <p:sp>
+        <p:nvSpPr>
           <p:cNvPr id="5" name="Rectangle 4"/>
           <p:cNvSpPr/>
           <p:nvPr/>
@@ -46791,7 +46914,7 @@
               <a:pPr>
                 <a:defRPr/>
               </a:pPr>
-              <a:t>50</a:t>
+              <a:t>51</a:t>
             </a:fld>
             <a:endParaRPr lang="en-US"/>
           </a:p>
@@ -46909,7 +47032,7 @@
 </p:sld>
 </file>
 
-<file path=ppt/slides/slide51.xml><?xml version="1.0" encoding="utf-8"?>
+<file path=ppt/slides/slide52.xml><?xml version="1.0" encoding="utf-8"?>
 <p:sld xmlns:a="http://schemas.openxmlformats.org/drawingml/2006/main" xmlns:r="http://schemas.openxmlformats.org/officeDocument/2006/relationships" xmlns:p="http://schemas.openxmlformats.org/presentationml/2006/main">
   <p:cSld>
     <p:spTree>
@@ -47014,7 +47137,7 @@
               <a:pPr>
                 <a:defRPr/>
               </a:pPr>
-              <a:t>51</a:t>
+              <a:t>52</a:t>
             </a:fld>
             <a:endParaRPr lang="en-US"/>
           </a:p>
@@ -47033,7 +47156,7 @@
 </p:sld>
 </file>
 
-<file path=ppt/slides/slide52.xml><?xml version="1.0" encoding="utf-8"?>
+<file path=ppt/slides/slide53.xml><?xml version="1.0" encoding="utf-8"?>
 <p:sld xmlns:a="http://schemas.openxmlformats.org/drawingml/2006/main" xmlns:r="http://schemas.openxmlformats.org/officeDocument/2006/relationships" xmlns:p="http://schemas.openxmlformats.org/presentationml/2006/main">
   <p:cSld>
     <p:spTree>
@@ -47163,7 +47286,7 @@
             <a:fld id="{4AD62F2E-7083-45D0-8919-2DFD6873DB31}" type="slidenum">
               <a:rPr lang="en-US" smtClean="0"/>
               <a:pPr/>
-              <a:t>52</a:t>
+              <a:t>53</a:t>
             </a:fld>
             <a:endParaRPr lang="en-US"/>
           </a:p>
@@ -47182,7 +47305,7 @@
 </p:sld>
 </file>
 
-<file path=ppt/slides/slide53.xml><?xml version="1.0" encoding="utf-8"?>
+<file path=ppt/slides/slide54.xml><?xml version="1.0" encoding="utf-8"?>
 <p:sld xmlns:a="http://schemas.openxmlformats.org/drawingml/2006/main" xmlns:r="http://schemas.openxmlformats.org/officeDocument/2006/relationships" xmlns:p="http://schemas.openxmlformats.org/presentationml/2006/main">
   <p:cSld>
     <p:spTree>
@@ -47330,7 +47453,7 @@
 </p:sld>
 </file>
 
-<file path=ppt/slides/slide54.xml><?xml version="1.0" encoding="utf-8"?>
+<file path=ppt/slides/slide55.xml><?xml version="1.0" encoding="utf-8"?>
 <p:sld xmlns:a="http://schemas.openxmlformats.org/drawingml/2006/main" xmlns:r="http://schemas.openxmlformats.org/officeDocument/2006/relationships" xmlns:p="http://schemas.openxmlformats.org/presentationml/2006/main">
   <p:cSld>
     <p:spTree>
@@ -47412,7 +47535,7 @@
 </p:sld>
 </file>
 
-<file path=ppt/slides/slide55.xml><?xml version="1.0" encoding="utf-8"?>
+<file path=ppt/slides/slide56.xml><?xml version="1.0" encoding="utf-8"?>
 <p:sld xmlns:a="http://schemas.openxmlformats.org/drawingml/2006/main" xmlns:r="http://schemas.openxmlformats.org/officeDocument/2006/relationships" xmlns:p="http://schemas.openxmlformats.org/presentationml/2006/main">
   <p:cSld>
     <p:spTree>
@@ -47524,7 +47647,7 @@
 </p:sld>
 </file>
 
-<file path=ppt/slides/slide56.xml><?xml version="1.0" encoding="utf-8"?>
+<file path=ppt/slides/slide57.xml><?xml version="1.0" encoding="utf-8"?>
 <p:sld xmlns:a="http://schemas.openxmlformats.org/drawingml/2006/main" xmlns:r="http://schemas.openxmlformats.org/officeDocument/2006/relationships" xmlns:p="http://schemas.openxmlformats.org/presentationml/2006/main">
   <p:cSld>
     <p:spTree>
@@ -47695,7 +47818,7 @@
             <a:fld id="{6590F4AF-F7D9-43D4-9D0C-E33F993FEEBD}" type="slidenum">
               <a:rPr lang="en-US" smtClean="0"/>
               <a:pPr/>
-              <a:t>56</a:t>
+              <a:t>57</a:t>
             </a:fld>
             <a:endParaRPr lang="en-US"/>
           </a:p>
@@ -49515,7 +49638,7 @@
 </p:sld>
 </file>
 
-<file path=ppt/slides/slide57.xml><?xml version="1.0" encoding="utf-8"?>
+<file path=ppt/slides/slide58.xml><?xml version="1.0" encoding="utf-8"?>
 <p:sld xmlns:a="http://schemas.openxmlformats.org/drawingml/2006/main" xmlns:r="http://schemas.openxmlformats.org/officeDocument/2006/relationships" xmlns:p="http://schemas.openxmlformats.org/presentationml/2006/main">
   <p:cSld>
     <p:spTree>
@@ -49639,7 +49762,7 @@
               <a:pPr>
                 <a:defRPr/>
               </a:pPr>
-              <a:t>57</a:t>
+              <a:t>58</a:t>
             </a:fld>
             <a:endParaRPr lang="en-US"/>
           </a:p>
@@ -50040,34 +50163,32 @@
       </p:sp>
       <p:pic>
         <p:nvPicPr>
-          <p:cNvPr id="52231" name="Picture 4"/>
+          <p:cNvPr id="5" name="Picture 4">
+            <a:extLst>
+              <a:ext uri="{FF2B5EF4-FFF2-40B4-BE49-F238E27FC236}">
+                <a16:creationId xmlns:a16="http://schemas.microsoft.com/office/drawing/2014/main" id="{8001DD01-72A3-0AAC-F515-5EB673183406}"/>
+              </a:ext>
+            </a:extLst>
+          </p:cNvPr>
           <p:cNvPicPr>
-            <a:picLocks noChangeAspect="1" noChangeArrowheads="1"/>
+            <a:picLocks noChangeAspect="1"/>
           </p:cNvPicPr>
           <p:nvPr/>
         </p:nvPicPr>
         <p:blipFill>
-          <a:blip r:embed="rId2" cstate="print"/>
-          <a:srcRect/>
+          <a:blip r:embed="rId2"/>
           <a:stretch>
             <a:fillRect/>
           </a:stretch>
         </p:blipFill>
-        <p:spPr bwMode="auto">
+        <p:spPr>
           <a:xfrm>
-            <a:off x="5065713" y="1597025"/>
-            <a:ext cx="3625850" cy="2400300"/>
+            <a:off x="4810125" y="1600200"/>
+            <a:ext cx="3486150" cy="2314575"/>
           </a:xfrm>
           <a:prstGeom prst="rect">
             <a:avLst/>
           </a:prstGeom>
-          <a:noFill/>
-          <a:ln w="9525">
-            <a:noFill/>
-            <a:miter lim="800000"/>
-            <a:headEnd/>
-            <a:tailEnd/>
-          </a:ln>
         </p:spPr>
       </p:pic>
     </p:spTree>
